--- a/outputs/produkte/mama-ceo/03-praesentationen/saeule-3/06-lektion-3-6.pptx
+++ b/outputs/produkte/mama-ceo/03-praesentationen/saeule-3/06-lektion-3-6.pptx
@@ -16,7 +16,7 @@
     <p:sldId id="264" r:id="rId16"/>
     <p:sldId id="265" r:id="rId17"/>
   </p:sldIdLst>
-  <p:sldSz cx="12191695" cy="6858000" type="screen4x3"/>
+  <p:sldSz cx="9144000" cy="5143500" type="screen4x3"/>
   <p:notesSz cx="6858000" cy="9144000"/>
   <p:defaultTextStyle>
     <a:defPPr>
@@ -1071,7 +1071,7 @@
           <a:lstStyle/>
           <a:p>
             <a:r>
-              <a:t>Ich sag dir ehrlich: auch bei mir kommt das Leben dazwischen, und es gab Phasen mit einem Familien-Notfall, wo ich kaum am Schreibtisch war. Das Kind, die Familie, das stand im Zentrum, und trotzdem lief mein Business weiter, nicht weil ich eine Übermama bin, sondern weil das System stand. Genau das baust du dir hier auf.</a:t>
+              <a:t>Ich sag dir ehrlich: auch bei mir kommt das Leben dazwischen, und es gab Phasen mit einem Familien-Notfall, wo ich kaum am Schreibtisch war. Das Kind, die Familie, das stand im Zentrum, und trotzdem lief mein Business weiter, nicht weil ich eine Übermama bin, sondern weil das System stand.</a:t>
             </a:r>
           </a:p>
         </p:txBody>
@@ -4143,7 +4143,7 @@
     <p:bg>
       <p:bgPr>
         <a:solidFill>
-          <a:srgbClr val="1F6F6B"/>
+          <a:srgbClr val="F1ECDD"/>
         </a:solidFill>
         <a:effectLst/>
       </p:bgPr>
@@ -4157,14 +4157,58 @@
       <p:grpSpPr/>
       <p:sp>
         <p:nvSpPr>
-          <p:cNvPr id="2" name="TextBox 1"/>
+          <p:cNvPr id="2" name="Oval 1"/>
+          <p:cNvSpPr/>
+          <p:nvPr/>
+        </p:nvSpPr>
+        <p:spPr>
+          <a:xfrm>
+            <a:off x="6858000" y="3840480"/>
+            <a:ext cx="3200400" cy="3200400"/>
+          </a:xfrm>
+          <a:prstGeom prst="ellipse">
+            <a:avLst/>
+          </a:prstGeom>
+          <a:solidFill>
+            <a:srgbClr val="DC822E"/>
+          </a:solidFill>
+          <a:ln>
+            <a:noFill/>
+          </a:ln>
+          <a:effectLst/>
+        </p:spPr>
+        <p:style>
+          <a:lnRef idx="1">
+            <a:schemeClr val="accent1"/>
+          </a:lnRef>
+          <a:fillRef idx="3">
+            <a:schemeClr val="accent1"/>
+          </a:fillRef>
+          <a:effectRef idx="2">
+            <a:schemeClr val="accent1"/>
+          </a:effectRef>
+          <a:fontRef idx="minor">
+            <a:schemeClr val="lt1"/>
+          </a:fontRef>
+        </p:style>
+        <p:txBody>
+          <a:bodyPr rtlCol="0" anchor="ctr"/>
+          <a:lstStyle/>
+          <a:p>
+            <a:pPr algn="ctr"/>
+          </a:p>
+        </p:txBody>
+      </p:sp>
+      <p:sp>
+        <p:nvSpPr>
+          <p:cNvPr id="3" name="TextBox 2"/>
           <p:cNvSpPr txBox="1"/>
           <p:nvPr/>
         </p:nvSpPr>
         <p:spPr>
           <a:xfrm>
-            <a:off x="914400" y="1920240"/>
-            <a:ext cx="10332720" cy="914400"/>
+            <a:off x="548640" y="548640"/>
+            <a:ext cx="8046720" cy="365760"/>
           </a:xfrm>
           <a:prstGeom prst="rect">
             <a:avLst/>
@@ -4177,36 +4221,72 @@
           </a:bodyPr>
           <a:lstStyle/>
           <a:p>
-            <a:pPr algn="l">
-              <a:spcBef>
-                <a:spcPts val="0"/>
-              </a:spcBef>
-              <a:spcAft>
-                <a:spcPts val="1000"/>
-              </a:spcAft>
-            </a:pPr>
-            <a:r>
-              <a:rPr sz="8000" b="1" i="0">
-                <a:solidFill>
-                  <a:srgbClr val="F1ECDD"/>
-                </a:solidFill>
-                <a:latin typeface="Georgia"/>
+            <a:r>
+              <a:rPr sz="1100" b="1" i="0">
+                <a:solidFill>
+                  <a:srgbClr val="DC822E"/>
+                </a:solidFill>
+                <a:latin typeface="Calibri"/>
               </a:rPr>
-              <a:t>3.6</a:t>
-            </a:r>
-          </a:p>
-        </p:txBody>
-      </p:sp>
-      <p:sp>
-        <p:nvSpPr>
-          <p:cNvPr id="3" name="TextBox 2"/>
+              <a:t>SÄULE 3 — DU BAUST DIE STRUKTUR</a:t>
+            </a:r>
+          </a:p>
+        </p:txBody>
+      </p:sp>
+      <p:sp>
+        <p:nvSpPr>
+          <p:cNvPr id="4" name="Rectangle 3"/>
+          <p:cNvSpPr/>
+          <p:nvPr/>
+        </p:nvSpPr>
+        <p:spPr>
+          <a:xfrm>
+            <a:off x="548640" y="960120"/>
+            <a:ext cx="548640" cy="45720"/>
+          </a:xfrm>
+          <a:prstGeom prst="rect">
+            <a:avLst/>
+          </a:prstGeom>
+          <a:solidFill>
+            <a:srgbClr val="DC822E"/>
+          </a:solidFill>
+          <a:ln>
+            <a:noFill/>
+          </a:ln>
+          <a:effectLst/>
+        </p:spPr>
+        <p:style>
+          <a:lnRef idx="1">
+            <a:schemeClr val="accent1"/>
+          </a:lnRef>
+          <a:fillRef idx="3">
+            <a:schemeClr val="accent1"/>
+          </a:fillRef>
+          <a:effectRef idx="2">
+            <a:schemeClr val="accent1"/>
+          </a:effectRef>
+          <a:fontRef idx="minor">
+            <a:schemeClr val="lt1"/>
+          </a:fontRef>
+        </p:style>
+        <p:txBody>
+          <a:bodyPr rtlCol="0" anchor="ctr"/>
+          <a:lstStyle/>
+          <a:p>
+            <a:pPr algn="ctr"/>
+          </a:p>
+        </p:txBody>
+      </p:sp>
+      <p:sp>
+        <p:nvSpPr>
+          <p:cNvPr id="5" name="TextBox 4"/>
           <p:cNvSpPr txBox="1"/>
           <p:nvPr/>
         </p:nvSpPr>
         <p:spPr>
           <a:xfrm>
-            <a:off x="914400" y="2971800"/>
-            <a:ext cx="10332720" cy="1828800"/>
+            <a:off x="548640" y="1234440"/>
+            <a:ext cx="7863840" cy="1463040"/>
           </a:xfrm>
           <a:prstGeom prst="rect">
             <a:avLst/>
@@ -4219,18 +4299,10 @@
           </a:bodyPr>
           <a:lstStyle/>
           <a:p>
-            <a:pPr algn="l">
-              <a:spcBef>
-                <a:spcPts val="0"/>
-              </a:spcBef>
-              <a:spcAft>
-                <a:spcPts val="1000"/>
-              </a:spcAft>
-            </a:pPr>
             <a:r>
               <a:rPr sz="4400" b="1" i="0">
                 <a:solidFill>
-                  <a:srgbClr val="FFFFFF"/>
+                  <a:srgbClr val="1A3A4A"/>
                 </a:solidFill>
                 <a:latin typeface="Georgia"/>
               </a:rPr>
@@ -4241,14 +4313,14 @@
       </p:sp>
       <p:sp>
         <p:nvSpPr>
-          <p:cNvPr id="4" name="TextBox 3"/>
+          <p:cNvPr id="6" name="TextBox 5"/>
           <p:cNvSpPr txBox="1"/>
           <p:nvPr/>
         </p:nvSpPr>
         <p:spPr>
           <a:xfrm>
-            <a:off x="914400" y="4480560"/>
-            <a:ext cx="10332720" cy="914400"/>
+            <a:off x="548640" y="2880360"/>
+            <a:ext cx="7680960" cy="1280160"/>
           </a:xfrm>
           <a:prstGeom prst="rect">
             <a:avLst/>
@@ -4261,22 +4333,83 @@
           </a:bodyPr>
           <a:lstStyle/>
           <a:p>
-            <a:pPr algn="l">
-              <a:spcBef>
-                <a:spcPts val="0"/>
-              </a:spcBef>
-              <a:spcAft>
-                <a:spcPts val="1000"/>
-              </a:spcAft>
-            </a:pPr>
-            <a:r>
-              <a:rPr sz="2400" b="0" i="1">
-                <a:solidFill>
-                  <a:srgbClr val="F1ECDD"/>
+            <a:r>
+              <a:rPr sz="1800" b="0" i="0">
+                <a:solidFill>
+                  <a:srgbClr val="2C3E50"/>
+                </a:solidFill>
+                <a:latin typeface="Georgia"/>
+              </a:rPr>
+              <a:t>Für die Tage, an denen das Leben dazwischenkommt</a:t>
+            </a:r>
+          </a:p>
+        </p:txBody>
+      </p:sp>
+      <p:sp>
+        <p:nvSpPr>
+          <p:cNvPr id="7" name="TextBox 6"/>
+          <p:cNvSpPr txBox="1"/>
+          <p:nvPr/>
+        </p:nvSpPr>
+        <p:spPr>
+          <a:xfrm>
+            <a:off x="548640" y="4572000"/>
+            <a:ext cx="3657600" cy="365760"/>
+          </a:xfrm>
+          <a:prstGeom prst="rect">
+            <a:avLst/>
+          </a:prstGeom>
+          <a:noFill/>
+        </p:spPr>
+        <p:txBody>
+          <a:bodyPr wrap="square" anchor="t" lIns="0" rIns="0" tIns="0" bIns="0">
+            <a:spAutoFit/>
+          </a:bodyPr>
+          <a:lstStyle/>
+          <a:p>
+            <a:r>
+              <a:rPr sz="1200" b="1" i="0">
+                <a:solidFill>
+                  <a:srgbClr val="12828C"/>
                 </a:solidFill>
                 <a:latin typeface="Calibri"/>
               </a:rPr>
-              <a:t>Für die Tage, an denen das Leben dazwischenkommt</a:t>
+              <a:t>Patricia Ulmann</a:t>
+            </a:r>
+          </a:p>
+        </p:txBody>
+      </p:sp>
+      <p:sp>
+        <p:nvSpPr>
+          <p:cNvPr id="8" name="TextBox 7"/>
+          <p:cNvSpPr txBox="1"/>
+          <p:nvPr/>
+        </p:nvSpPr>
+        <p:spPr>
+          <a:xfrm>
+            <a:off x="4937760" y="4572000"/>
+            <a:ext cx="3657600" cy="365760"/>
+          </a:xfrm>
+          <a:prstGeom prst="rect">
+            <a:avLst/>
+          </a:prstGeom>
+          <a:noFill/>
+        </p:spPr>
+        <p:txBody>
+          <a:bodyPr wrap="square" anchor="t" lIns="0" rIns="0" tIns="0" bIns="0">
+            <a:spAutoFit/>
+          </a:bodyPr>
+          <a:lstStyle/>
+          <a:p>
+            <a:pPr algn="r"/>
+            <a:r>
+              <a:rPr sz="1100" b="0" i="0">
+                <a:solidFill>
+                  <a:srgbClr val="7A8A95"/>
+                </a:solidFill>
+                <a:latin typeface="Calibri"/>
+              </a:rPr>
+              <a:t>mumlifebalance.ch</a:t>
             </a:r>
           </a:p>
         </p:txBody>
@@ -4290,112 +4423,6 @@
 </file>
 
 <file path=ppt/slides/slide10.xml><?xml version="1.0" encoding="utf-8"?>
-<p:sld xmlns:a="http://schemas.openxmlformats.org/drawingml/2006/main" xmlns:p="http://schemas.openxmlformats.org/presentationml/2006/main" xmlns:r="http://schemas.openxmlformats.org/officeDocument/2006/relationships">
-  <p:cSld>
-    <p:bg>
-      <p:bgPr>
-        <a:solidFill>
-          <a:srgbClr val="1F6F6B"/>
-        </a:solidFill>
-        <a:effectLst/>
-      </p:bgPr>
-    </p:bg>
-    <p:spTree>
-      <p:nvGrpSpPr>
-        <p:cNvPr id="1" name=""/>
-        <p:cNvGrpSpPr/>
-        <p:nvPr/>
-      </p:nvGrpSpPr>
-      <p:grpSpPr/>
-      <p:sp>
-        <p:nvSpPr>
-          <p:cNvPr id="2" name="TextBox 1"/>
-          <p:cNvSpPr txBox="1"/>
-          <p:nvPr/>
-        </p:nvSpPr>
-        <p:spPr>
-          <a:xfrm>
-            <a:off x="1005840" y="2194560"/>
-            <a:ext cx="10149840" cy="2743200"/>
-          </a:xfrm>
-          <a:prstGeom prst="rect">
-            <a:avLst/>
-          </a:prstGeom>
-          <a:noFill/>
-        </p:spPr>
-        <p:txBody>
-          <a:bodyPr wrap="square" anchor="ctr" lIns="0" rIns="0" tIns="0" bIns="0">
-            <a:spAutoFit/>
-          </a:bodyPr>
-          <a:lstStyle/>
-          <a:p>
-            <a:pPr algn="l">
-              <a:spcBef>
-                <a:spcPts val="0"/>
-              </a:spcBef>
-              <a:spcAft>
-                <a:spcPts val="1800"/>
-              </a:spcAft>
-            </a:pPr>
-            <a:r>
-              <a:rPr sz="2200" b="0" i="0">
-                <a:solidFill>
-                  <a:srgbClr val="F1ECDD"/>
-                </a:solidFill>
-                <a:latin typeface="Calibri"/>
-              </a:rPr>
-              <a:t>📋 Im Arbeitsblatt: dein 50%-Notfall-Plan</a:t>
-            </a:r>
-          </a:p>
-          <a:p>
-            <a:pPr algn="l">
-              <a:spcBef>
-                <a:spcPts val="0"/>
-              </a:spcBef>
-              <a:spcAft>
-                <a:spcPts val="1800"/>
-              </a:spcAft>
-            </a:pPr>
-            <a:r>
-              <a:rPr sz="3200" b="1" i="0">
-                <a:solidFill>
-                  <a:srgbClr val="FFFFFF"/>
-                </a:solidFill>
-                <a:latin typeface="Georgia"/>
-              </a:rPr>
-              <a:t>Säule 3 abgeschlossen 🎉</a:t>
-            </a:r>
-          </a:p>
-          <a:p>
-            <a:pPr algn="l">
-              <a:spcBef>
-                <a:spcPts val="0"/>
-              </a:spcBef>
-              <a:spcAft>
-                <a:spcPts val="1800"/>
-              </a:spcAft>
-            </a:pPr>
-            <a:r>
-              <a:rPr sz="2200" b="0" i="0">
-                <a:solidFill>
-                  <a:srgbClr val="F1ECDD"/>
-                </a:solidFill>
-                <a:latin typeface="Calibri"/>
-              </a:rPr>
-              <a:t>Wir sehen uns im Live-Call 2 — der Notion-Brain-Sprechstunde.</a:t>
-            </a:r>
-          </a:p>
-        </p:txBody>
-      </p:sp>
-    </p:spTree>
-  </p:cSld>
-  <p:clrMapOvr>
-    <a:masterClrMapping/>
-  </p:clrMapOvr>
-</p:sld>
-</file>
-
-<file path=ppt/slides/slide2.xml><?xml version="1.0" encoding="utf-8"?>
 <p:sld xmlns:a="http://schemas.openxmlformats.org/drawingml/2006/main" xmlns:p="http://schemas.openxmlformats.org/presentationml/2006/main" xmlns:r="http://schemas.openxmlformats.org/officeDocument/2006/relationships">
   <p:cSld>
     <p:bg>
@@ -4415,20 +4442,54 @@
       <p:grpSpPr/>
       <p:sp>
         <p:nvSpPr>
-          <p:cNvPr id="2" name="Rectangle 1"/>
+          <p:cNvPr id="2" name="TextBox 1"/>
+          <p:cNvSpPr txBox="1"/>
+          <p:nvPr/>
+        </p:nvSpPr>
+        <p:spPr>
+          <a:xfrm>
+            <a:off x="548640" y="457200"/>
+            <a:ext cx="8046720" cy="822960"/>
+          </a:xfrm>
+          <a:prstGeom prst="rect">
+            <a:avLst/>
+          </a:prstGeom>
+          <a:noFill/>
+        </p:spPr>
+        <p:txBody>
+          <a:bodyPr wrap="square" anchor="t" lIns="0" rIns="0" tIns="0" bIns="0">
+            <a:spAutoFit/>
+          </a:bodyPr>
+          <a:lstStyle/>
+          <a:p>
+            <a:r>
+              <a:rPr sz="3000" b="1" i="0">
+                <a:solidFill>
+                  <a:srgbClr val="1A3A4A"/>
+                </a:solidFill>
+                <a:latin typeface="Georgia"/>
+              </a:rPr>
+              <a:t>Säule 3 abgeschlossen 🎉</a:t>
+            </a:r>
+          </a:p>
+        </p:txBody>
+      </p:sp>
+      <p:sp>
+        <p:nvSpPr>
+          <p:cNvPr id="3" name="Rectangle 2"/>
           <p:cNvSpPr/>
           <p:nvPr/>
         </p:nvSpPr>
         <p:spPr>
           <a:xfrm>
-            <a:off x="548640" y="502920"/>
-            <a:ext cx="201168" cy="201168"/>
+            <a:off x="548640" y="1737360"/>
+            <a:ext cx="3931920" cy="2743200"/>
           </a:xfrm>
           <a:prstGeom prst="rect">
             <a:avLst/>
           </a:prstGeom>
           <a:solidFill>
-            <a:srgbClr val="1F6F6B"/>
+            <a:srgbClr val="F1ECDD"/>
           </a:solidFill>
           <a:ln>
             <a:noFill/>
@@ -4459,14 +4520,58 @@
       </p:sp>
       <p:sp>
         <p:nvSpPr>
-          <p:cNvPr id="3" name="TextBox 2"/>
+          <p:cNvPr id="4" name="Rectangle 3"/>
+          <p:cNvSpPr/>
+          <p:nvPr/>
+        </p:nvSpPr>
+        <p:spPr>
+          <a:xfrm>
+            <a:off x="548640" y="1737360"/>
+            <a:ext cx="3931920" cy="91440"/>
+          </a:xfrm>
+          <a:prstGeom prst="rect">
+            <a:avLst/>
+          </a:prstGeom>
+          <a:solidFill>
+            <a:srgbClr val="12828C"/>
+          </a:solidFill>
+          <a:ln>
+            <a:noFill/>
+          </a:ln>
+          <a:effectLst/>
+        </p:spPr>
+        <p:style>
+          <a:lnRef idx="1">
+            <a:schemeClr val="accent1"/>
+          </a:lnRef>
+          <a:fillRef idx="3">
+            <a:schemeClr val="accent1"/>
+          </a:fillRef>
+          <a:effectRef idx="2">
+            <a:schemeClr val="accent1"/>
+          </a:effectRef>
+          <a:fontRef idx="minor">
+            <a:schemeClr val="lt1"/>
+          </a:fontRef>
+        </p:style>
+        <p:txBody>
+          <a:bodyPr rtlCol="0" anchor="ctr"/>
+          <a:lstStyle/>
+          <a:p>
+            <a:pPr algn="ctr"/>
+          </a:p>
+        </p:txBody>
+      </p:sp>
+      <p:sp>
+        <p:nvSpPr>
+          <p:cNvPr id="5" name="TextBox 4"/>
           <p:cNvSpPr txBox="1"/>
           <p:nvPr/>
         </p:nvSpPr>
         <p:spPr>
           <a:xfrm>
-            <a:off x="868680" y="457200"/>
-            <a:ext cx="10424160" cy="1005840"/>
+            <a:off x="731520" y="1920240"/>
+            <a:ext cx="3657600" cy="274320"/>
           </a:xfrm>
           <a:prstGeom prst="rect">
             <a:avLst/>
@@ -4479,36 +4584,28 @@
           </a:bodyPr>
           <a:lstStyle/>
           <a:p>
-            <a:pPr algn="l">
-              <a:spcBef>
-                <a:spcPts val="0"/>
-              </a:spcBef>
-              <a:spcAft>
-                <a:spcPts val="1000"/>
-              </a:spcAft>
-            </a:pPr>
-            <a:r>
-              <a:rPr sz="3200" b="1" i="0">
-                <a:solidFill>
-                  <a:srgbClr val="1F6F6B"/>
-                </a:solidFill>
-                <a:latin typeface="Georgia"/>
+            <a:r>
+              <a:rPr sz="1000" b="1" i="0">
+                <a:solidFill>
+                  <a:srgbClr val="0D6168"/>
+                </a:solidFill>
+                <a:latin typeface="Calibri"/>
               </a:rPr>
-              <a:t>„Alles oder nichts“ ist die Falle</a:t>
-            </a:r>
-          </a:p>
-        </p:txBody>
-      </p:sp>
-      <p:sp>
-        <p:nvSpPr>
-          <p:cNvPr id="4" name="TextBox 3"/>
+              <a:t>📋  ARBEITSBLATT</a:t>
+            </a:r>
+          </a:p>
+        </p:txBody>
+      </p:sp>
+      <p:sp>
+        <p:nvSpPr>
+          <p:cNvPr id="6" name="TextBox 5"/>
           <p:cNvSpPr txBox="1"/>
           <p:nvPr/>
         </p:nvSpPr>
         <p:spPr>
           <a:xfrm>
-            <a:off x="868680" y="1783080"/>
-            <a:ext cx="10424160" cy="4572000"/>
+            <a:off x="731520" y="2286000"/>
+            <a:ext cx="3657600" cy="548640"/>
           </a:xfrm>
           <a:prstGeom prst="rect">
             <a:avLst/>
@@ -4521,60 +4618,548 @@
           </a:bodyPr>
           <a:lstStyle/>
           <a:p>
-            <a:pPr algn="l">
-              <a:spcBef>
-                <a:spcPts val="0"/>
-              </a:spcBef>
-              <a:spcAft>
-                <a:spcPts val="1400"/>
-              </a:spcAft>
-            </a:pPr>
-            <a:r>
-              <a:rPr sz="2600" b="1" i="0">
-                <a:solidFill>
-                  <a:srgbClr val="2A2A2A"/>
+            <a:r>
+              <a:rPr sz="1600" b="1" i="0">
+                <a:solidFill>
+                  <a:srgbClr val="1A3A4A"/>
                 </a:solidFill>
                 <a:latin typeface="Georgia"/>
               </a:rPr>
-              <a:t>100% Plan  ↔  alles fällt aus</a:t>
-            </a:r>
-          </a:p>
-          <a:p>
-            <a:pPr algn="l">
-              <a:spcBef>
-                <a:spcPts val="0"/>
-              </a:spcBef>
-              <a:spcAft>
-                <a:spcPts val="1400"/>
-              </a:spcAft>
-            </a:pPr>
-            <a:r>
-              <a:rPr sz="2100" b="0" i="0">
-                <a:solidFill>
-                  <a:srgbClr val="2A2A2A"/>
+              <a:t>Dein 50%-Plan</a:t>
+            </a:r>
+          </a:p>
+        </p:txBody>
+      </p:sp>
+      <p:sp>
+        <p:nvSpPr>
+          <p:cNvPr id="7" name="TextBox 6"/>
+          <p:cNvSpPr txBox="1"/>
+          <p:nvPr/>
+        </p:nvSpPr>
+        <p:spPr>
+          <a:xfrm>
+            <a:off x="731520" y="2880360"/>
+            <a:ext cx="3566160" cy="1463040"/>
+          </a:xfrm>
+          <a:prstGeom prst="rect">
+            <a:avLst/>
+          </a:prstGeom>
+          <a:noFill/>
+        </p:spPr>
+        <p:txBody>
+          <a:bodyPr wrap="square" anchor="t" lIns="0" rIns="0" tIns="0" bIns="0">
+            <a:spAutoFit/>
+          </a:bodyPr>
+          <a:lstStyle/>
+          <a:p>
+            <a:r>
+              <a:rPr sz="1250" b="0" i="0">
+                <a:solidFill>
+                  <a:srgbClr val="2C3E50"/>
                 </a:solidFill>
                 <a:latin typeface="Calibri"/>
               </a:rPr>
-              <a:t>Dazwischen liegt der Mittelweg: der 50%-Plan.</a:t>
-            </a:r>
-          </a:p>
-          <a:p>
-            <a:pPr algn="l">
-              <a:spcBef>
-                <a:spcPts val="0"/>
-              </a:spcBef>
-              <a:spcAft>
-                <a:spcPts val="1400"/>
-              </a:spcAft>
-            </a:pPr>
-            <a:r>
-              <a:rPr sz="2000" b="0" i="1">
-                <a:solidFill>
-                  <a:srgbClr val="6E6E6E"/>
+              <a:t>Definier deinen eigenen 50%-Notfall-Plan, bevor du ihn brauchst. Was bleibt, was pausiert.</a:t>
+            </a:r>
+          </a:p>
+        </p:txBody>
+      </p:sp>
+      <p:sp>
+        <p:nvSpPr>
+          <p:cNvPr id="8" name="Rectangle 7"/>
+          <p:cNvSpPr/>
+          <p:nvPr/>
+        </p:nvSpPr>
+        <p:spPr>
+          <a:xfrm>
+            <a:off x="4663440" y="1737360"/>
+            <a:ext cx="3931920" cy="2743200"/>
+          </a:xfrm>
+          <a:prstGeom prst="rect">
+            <a:avLst/>
+          </a:prstGeom>
+          <a:solidFill>
+            <a:srgbClr val="F1ECDD"/>
+          </a:solidFill>
+          <a:ln>
+            <a:noFill/>
+          </a:ln>
+          <a:effectLst/>
+        </p:spPr>
+        <p:style>
+          <a:lnRef idx="1">
+            <a:schemeClr val="accent1"/>
+          </a:lnRef>
+          <a:fillRef idx="3">
+            <a:schemeClr val="accent1"/>
+          </a:fillRef>
+          <a:effectRef idx="2">
+            <a:schemeClr val="accent1"/>
+          </a:effectRef>
+          <a:fontRef idx="minor">
+            <a:schemeClr val="lt1"/>
+          </a:fontRef>
+        </p:style>
+        <p:txBody>
+          <a:bodyPr rtlCol="0" anchor="ctr"/>
+          <a:lstStyle/>
+          <a:p>
+            <a:pPr algn="ctr"/>
+          </a:p>
+        </p:txBody>
+      </p:sp>
+      <p:sp>
+        <p:nvSpPr>
+          <p:cNvPr id="9" name="Rectangle 8"/>
+          <p:cNvSpPr/>
+          <p:nvPr/>
+        </p:nvSpPr>
+        <p:spPr>
+          <a:xfrm>
+            <a:off x="4663440" y="1737360"/>
+            <a:ext cx="3931920" cy="91440"/>
+          </a:xfrm>
+          <a:prstGeom prst="rect">
+            <a:avLst/>
+          </a:prstGeom>
+          <a:solidFill>
+            <a:srgbClr val="DC822E"/>
+          </a:solidFill>
+          <a:ln>
+            <a:noFill/>
+          </a:ln>
+          <a:effectLst/>
+        </p:spPr>
+        <p:style>
+          <a:lnRef idx="1">
+            <a:schemeClr val="accent1"/>
+          </a:lnRef>
+          <a:fillRef idx="3">
+            <a:schemeClr val="accent1"/>
+          </a:fillRef>
+          <a:effectRef idx="2">
+            <a:schemeClr val="accent1"/>
+          </a:effectRef>
+          <a:fontRef idx="minor">
+            <a:schemeClr val="lt1"/>
+          </a:fontRef>
+        </p:style>
+        <p:txBody>
+          <a:bodyPr rtlCol="0" anchor="ctr"/>
+          <a:lstStyle/>
+          <a:p>
+            <a:pPr algn="ctr"/>
+          </a:p>
+        </p:txBody>
+      </p:sp>
+      <p:sp>
+        <p:nvSpPr>
+          <p:cNvPr id="10" name="TextBox 9"/>
+          <p:cNvSpPr txBox="1"/>
+          <p:nvPr/>
+        </p:nvSpPr>
+        <p:spPr>
+          <a:xfrm>
+            <a:off x="4846320" y="1920240"/>
+            <a:ext cx="3657600" cy="274320"/>
+          </a:xfrm>
+          <a:prstGeom prst="rect">
+            <a:avLst/>
+          </a:prstGeom>
+          <a:noFill/>
+        </p:spPr>
+        <p:txBody>
+          <a:bodyPr wrap="square" anchor="t" lIns="0" rIns="0" tIns="0" bIns="0">
+            <a:spAutoFit/>
+          </a:bodyPr>
+          <a:lstStyle/>
+          <a:p>
+            <a:r>
+              <a:rPr sz="1000" b="1" i="0">
+                <a:solidFill>
+                  <a:srgbClr val="DC822E"/>
                 </a:solidFill>
                 <a:latin typeface="Calibri"/>
               </a:rPr>
-              <a:t>Sonst fühlst du dich bei jedem Notfall als Versagerin.</a:t>
+              <a:t>▶  ALS NÄCHSTES</a:t>
+            </a:r>
+          </a:p>
+        </p:txBody>
+      </p:sp>
+      <p:sp>
+        <p:nvSpPr>
+          <p:cNvPr id="11" name="TextBox 10"/>
+          <p:cNvSpPr txBox="1"/>
+          <p:nvPr/>
+        </p:nvSpPr>
+        <p:spPr>
+          <a:xfrm>
+            <a:off x="4846320" y="2286000"/>
+            <a:ext cx="3657600" cy="548640"/>
+          </a:xfrm>
+          <a:prstGeom prst="rect">
+            <a:avLst/>
+          </a:prstGeom>
+          <a:noFill/>
+        </p:spPr>
+        <p:txBody>
+          <a:bodyPr wrap="square" anchor="t" lIns="0" rIns="0" tIns="0" bIns="0">
+            <a:spAutoFit/>
+          </a:bodyPr>
+          <a:lstStyle/>
+          <a:p>
+            <a:r>
+              <a:rPr sz="1600" b="1" i="0">
+                <a:solidFill>
+                  <a:srgbClr val="1A3A4A"/>
+                </a:solidFill>
+                <a:latin typeface="Georgia"/>
+              </a:rPr>
+              <a:t>Live-Call 2</a:t>
+            </a:r>
+          </a:p>
+        </p:txBody>
+      </p:sp>
+      <p:sp>
+        <p:nvSpPr>
+          <p:cNvPr id="12" name="TextBox 11"/>
+          <p:cNvSpPr txBox="1"/>
+          <p:nvPr/>
+        </p:nvSpPr>
+        <p:spPr>
+          <a:xfrm>
+            <a:off x="4846320" y="2880360"/>
+            <a:ext cx="3566160" cy="1463040"/>
+          </a:xfrm>
+          <a:prstGeom prst="rect">
+            <a:avLst/>
+          </a:prstGeom>
+          <a:noFill/>
+        </p:spPr>
+        <p:txBody>
+          <a:bodyPr wrap="square" anchor="t" lIns="0" rIns="0" tIns="0" bIns="0">
+            <a:spAutoFit/>
+          </a:bodyPr>
+          <a:lstStyle/>
+          <a:p>
+            <a:r>
+              <a:rPr sz="1250" b="0" i="0">
+                <a:solidFill>
+                  <a:srgbClr val="2C3E50"/>
+                </a:solidFill>
+                <a:latin typeface="Calibri"/>
+              </a:rPr>
+              <a:t>Notion-Brain-Sprechstunde — deine Struktur steht, jetzt feilen wir gemeinsam.</a:t>
+            </a:r>
+          </a:p>
+        </p:txBody>
+      </p:sp>
+      <p:sp>
+        <p:nvSpPr>
+          <p:cNvPr id="13" name="TextBox 12"/>
+          <p:cNvSpPr txBox="1"/>
+          <p:nvPr/>
+        </p:nvSpPr>
+        <p:spPr>
+          <a:xfrm>
+            <a:off x="457200" y="4754880"/>
+            <a:ext cx="5486400" cy="274320"/>
+          </a:xfrm>
+          <a:prstGeom prst="rect">
+            <a:avLst/>
+          </a:prstGeom>
+          <a:noFill/>
+        </p:spPr>
+        <p:txBody>
+          <a:bodyPr wrap="square" anchor="t" lIns="0" rIns="0" tIns="0" bIns="0">
+            <a:spAutoFit/>
+          </a:bodyPr>
+          <a:lstStyle/>
+          <a:p>
+            <a:r>
+              <a:rPr sz="900" b="0" i="0">
+                <a:solidFill>
+                  <a:srgbClr val="7A8A95"/>
+                </a:solidFill>
+                <a:latin typeface="Calibri"/>
+              </a:rPr>
+              <a:t>Mama-CEO · Säule 3 · Lektion 3.6</a:t>
+            </a:r>
+          </a:p>
+        </p:txBody>
+      </p:sp>
+      <p:sp>
+        <p:nvSpPr>
+          <p:cNvPr id="14" name="TextBox 13"/>
+          <p:cNvSpPr txBox="1"/>
+          <p:nvPr/>
+        </p:nvSpPr>
+        <p:spPr>
+          <a:xfrm>
+            <a:off x="6400800" y="4754880"/>
+            <a:ext cx="2286000" cy="274320"/>
+          </a:xfrm>
+          <a:prstGeom prst="rect">
+            <a:avLst/>
+          </a:prstGeom>
+          <a:noFill/>
+        </p:spPr>
+        <p:txBody>
+          <a:bodyPr wrap="square" anchor="t" lIns="0" rIns="0" tIns="0" bIns="0">
+            <a:spAutoFit/>
+          </a:bodyPr>
+          <a:lstStyle/>
+          <a:p>
+            <a:pPr algn="r"/>
+            <a:r>
+              <a:rPr sz="900" b="0" i="0">
+                <a:solidFill>
+                  <a:srgbClr val="7A8A95"/>
+                </a:solidFill>
+                <a:latin typeface="Calibri"/>
+              </a:rPr>
+              <a:t>Mum Life Balance</a:t>
+            </a:r>
+          </a:p>
+        </p:txBody>
+      </p:sp>
+    </p:spTree>
+  </p:cSld>
+  <p:clrMapOvr>
+    <a:masterClrMapping/>
+  </p:clrMapOvr>
+</p:sld>
+</file>
+
+<file path=ppt/slides/slide2.xml><?xml version="1.0" encoding="utf-8"?>
+<p:sld xmlns:a="http://schemas.openxmlformats.org/drawingml/2006/main" xmlns:p="http://schemas.openxmlformats.org/presentationml/2006/main" xmlns:r="http://schemas.openxmlformats.org/officeDocument/2006/relationships">
+  <p:cSld>
+    <p:bg>
+      <p:bgPr>
+        <a:solidFill>
+          <a:srgbClr val="12828C"/>
+        </a:solidFill>
+        <a:effectLst/>
+      </p:bgPr>
+    </p:bg>
+    <p:spTree>
+      <p:nvGrpSpPr>
+        <p:cNvPr id="1" name=""/>
+        <p:cNvGrpSpPr/>
+        <p:nvPr/>
+      </p:nvGrpSpPr>
+      <p:grpSpPr/>
+      <p:sp>
+        <p:nvSpPr>
+          <p:cNvPr id="2" name="TextBox 1"/>
+          <p:cNvSpPr txBox="1"/>
+          <p:nvPr/>
+        </p:nvSpPr>
+        <p:spPr>
+          <a:xfrm>
+            <a:off x="548640" y="1097280"/>
+            <a:ext cx="8046720" cy="365760"/>
+          </a:xfrm>
+          <a:prstGeom prst="rect">
+            <a:avLst/>
+          </a:prstGeom>
+          <a:noFill/>
+        </p:spPr>
+        <p:txBody>
+          <a:bodyPr wrap="square" anchor="t" lIns="0" rIns="0" tIns="0" bIns="0">
+            <a:spAutoFit/>
+          </a:bodyPr>
+          <a:lstStyle/>
+          <a:p>
+            <a:r>
+              <a:rPr sz="1100" b="1" i="0">
+                <a:solidFill>
+                  <a:srgbClr val="DC822E"/>
+                </a:solidFill>
+                <a:latin typeface="Calibri"/>
+              </a:rPr>
+              <a:t>DIE FALLE</a:t>
+            </a:r>
+          </a:p>
+        </p:txBody>
+      </p:sp>
+      <p:sp>
+        <p:nvSpPr>
+          <p:cNvPr id="3" name="Rectangle 2"/>
+          <p:cNvSpPr/>
+          <p:nvPr/>
+        </p:nvSpPr>
+        <p:spPr>
+          <a:xfrm>
+            <a:off x="548640" y="1554480"/>
+            <a:ext cx="548640" cy="45720"/>
+          </a:xfrm>
+          <a:prstGeom prst="rect">
+            <a:avLst/>
+          </a:prstGeom>
+          <a:solidFill>
+            <a:srgbClr val="DC822E"/>
+          </a:solidFill>
+          <a:ln>
+            <a:noFill/>
+          </a:ln>
+          <a:effectLst/>
+        </p:spPr>
+        <p:style>
+          <a:lnRef idx="1">
+            <a:schemeClr val="accent1"/>
+          </a:lnRef>
+          <a:fillRef idx="3">
+            <a:schemeClr val="accent1"/>
+          </a:fillRef>
+          <a:effectRef idx="2">
+            <a:schemeClr val="accent1"/>
+          </a:effectRef>
+          <a:fontRef idx="minor">
+            <a:schemeClr val="lt1"/>
+          </a:fontRef>
+        </p:style>
+        <p:txBody>
+          <a:bodyPr rtlCol="0" anchor="ctr"/>
+          <a:lstStyle/>
+          <a:p>
+            <a:pPr algn="ctr"/>
+          </a:p>
+        </p:txBody>
+      </p:sp>
+      <p:sp>
+        <p:nvSpPr>
+          <p:cNvPr id="4" name="TextBox 3"/>
+          <p:cNvSpPr txBox="1"/>
+          <p:nvPr/>
+        </p:nvSpPr>
+        <p:spPr>
+          <a:xfrm>
+            <a:off x="548640" y="1920240"/>
+            <a:ext cx="8046720" cy="2194560"/>
+          </a:xfrm>
+          <a:prstGeom prst="rect">
+            <a:avLst/>
+          </a:prstGeom>
+          <a:noFill/>
+        </p:spPr>
+        <p:txBody>
+          <a:bodyPr wrap="square" anchor="t" lIns="0" rIns="0" tIns="0" bIns="0">
+            <a:spAutoFit/>
+          </a:bodyPr>
+          <a:lstStyle/>
+          <a:p>
+            <a:r>
+              <a:rPr sz="2800" b="1" i="0">
+                <a:solidFill>
+                  <a:srgbClr val="F1ECDD"/>
+                </a:solidFill>
+                <a:latin typeface="Georgia"/>
+              </a:rPr>
+              <a:t>„Alles oder nichts“ ist der grösste Planungs-Fehler.</a:t>
+            </a:r>
+          </a:p>
+        </p:txBody>
+      </p:sp>
+      <p:sp>
+        <p:nvSpPr>
+          <p:cNvPr id="5" name="TextBox 4"/>
+          <p:cNvSpPr txBox="1"/>
+          <p:nvPr/>
+        </p:nvSpPr>
+        <p:spPr>
+          <a:xfrm>
+            <a:off x="548640" y="3703320"/>
+            <a:ext cx="8046720" cy="731520"/>
+          </a:xfrm>
+          <a:prstGeom prst="rect">
+            <a:avLst/>
+          </a:prstGeom>
+          <a:noFill/>
+        </p:spPr>
+        <p:txBody>
+          <a:bodyPr wrap="square" anchor="t" lIns="0" rIns="0" tIns="0" bIns="0">
+            <a:spAutoFit/>
+          </a:bodyPr>
+          <a:lstStyle/>
+          <a:p>
+            <a:r>
+              <a:rPr sz="1500" b="0" i="1">
+                <a:solidFill>
+                  <a:srgbClr val="F1ECDD"/>
+                </a:solidFill>
+                <a:latin typeface="Calibri"/>
+              </a:rPr>
+              <a:t>100% Plan ↔ alles fällt aus. Dazwischen liegt der 50%-Plan.</a:t>
+            </a:r>
+          </a:p>
+        </p:txBody>
+      </p:sp>
+      <p:sp>
+        <p:nvSpPr>
+          <p:cNvPr id="6" name="TextBox 5"/>
+          <p:cNvSpPr txBox="1"/>
+          <p:nvPr/>
+        </p:nvSpPr>
+        <p:spPr>
+          <a:xfrm>
+            <a:off x="457200" y="4754880"/>
+            <a:ext cx="5486400" cy="274320"/>
+          </a:xfrm>
+          <a:prstGeom prst="rect">
+            <a:avLst/>
+          </a:prstGeom>
+          <a:noFill/>
+        </p:spPr>
+        <p:txBody>
+          <a:bodyPr wrap="square" anchor="t" lIns="0" rIns="0" tIns="0" bIns="0">
+            <a:spAutoFit/>
+          </a:bodyPr>
+          <a:lstStyle/>
+          <a:p>
+            <a:r>
+              <a:rPr sz="900" b="0" i="0">
+                <a:solidFill>
+                  <a:srgbClr val="F1ECDD"/>
+                </a:solidFill>
+                <a:latin typeface="Calibri"/>
+              </a:rPr>
+              <a:t>Mama-CEO · Säule 3 · Lektion 3.6</a:t>
+            </a:r>
+          </a:p>
+        </p:txBody>
+      </p:sp>
+      <p:sp>
+        <p:nvSpPr>
+          <p:cNvPr id="7" name="TextBox 6"/>
+          <p:cNvSpPr txBox="1"/>
+          <p:nvPr/>
+        </p:nvSpPr>
+        <p:spPr>
+          <a:xfrm>
+            <a:off x="6400800" y="4754880"/>
+            <a:ext cx="2286000" cy="274320"/>
+          </a:xfrm>
+          <a:prstGeom prst="rect">
+            <a:avLst/>
+          </a:prstGeom>
+          <a:noFill/>
+        </p:spPr>
+        <p:txBody>
+          <a:bodyPr wrap="square" anchor="t" lIns="0" rIns="0" tIns="0" bIns="0">
+            <a:spAutoFit/>
+          </a:bodyPr>
+          <a:lstStyle/>
+          <a:p>
+            <a:pPr algn="r"/>
+            <a:r>
+              <a:rPr sz="900" b="0" i="0">
+                <a:solidFill>
+                  <a:srgbClr val="F1ECDD"/>
+                </a:solidFill>
+                <a:latin typeface="Calibri"/>
+              </a:rPr>
+              <a:t>Mum Life Balance</a:t>
             </a:r>
           </a:p>
         </p:txBody>
@@ -4607,58 +5192,14 @@
       <p:grpSpPr/>
       <p:sp>
         <p:nvSpPr>
-          <p:cNvPr id="2" name="Rectangle 1"/>
-          <p:cNvSpPr/>
-          <p:nvPr/>
-        </p:nvSpPr>
-        <p:spPr>
-          <a:xfrm>
-            <a:off x="548640" y="502920"/>
-            <a:ext cx="201168" cy="201168"/>
-          </a:xfrm>
-          <a:prstGeom prst="rect">
-            <a:avLst/>
-          </a:prstGeom>
-          <a:solidFill>
-            <a:srgbClr val="1F6F6B"/>
-          </a:solidFill>
-          <a:ln>
-            <a:noFill/>
-          </a:ln>
-          <a:effectLst/>
-        </p:spPr>
-        <p:style>
-          <a:lnRef idx="1">
-            <a:schemeClr val="accent1"/>
-          </a:lnRef>
-          <a:fillRef idx="3">
-            <a:schemeClr val="accent1"/>
-          </a:fillRef>
-          <a:effectRef idx="2">
-            <a:schemeClr val="accent1"/>
-          </a:effectRef>
-          <a:fontRef idx="minor">
-            <a:schemeClr val="lt1"/>
-          </a:fontRef>
-        </p:style>
-        <p:txBody>
-          <a:bodyPr rtlCol="0" anchor="ctr"/>
-          <a:lstStyle/>
-          <a:p>
-            <a:pPr algn="ctr"/>
-          </a:p>
-        </p:txBody>
-      </p:sp>
-      <p:sp>
-        <p:nvSpPr>
-          <p:cNvPr id="3" name="TextBox 2"/>
+          <p:cNvPr id="2" name="TextBox 1"/>
           <p:cNvSpPr txBox="1"/>
           <p:nvPr/>
         </p:nvSpPr>
         <p:spPr>
           <a:xfrm>
-            <a:off x="868680" y="457200"/>
-            <a:ext cx="10424160" cy="1005840"/>
+            <a:off x="548640" y="457200"/>
+            <a:ext cx="8046720" cy="914400"/>
           </a:xfrm>
           <a:prstGeom prst="rect">
             <a:avLst/>
@@ -4671,7 +5212,41 @@
           </a:bodyPr>
           <a:lstStyle/>
           <a:p>
-            <a:pPr algn="l">
+            <a:r>
+              <a:rPr sz="3000" b="1" i="0">
+                <a:solidFill>
+                  <a:srgbClr val="1A3A4A"/>
+                </a:solidFill>
+                <a:latin typeface="Georgia"/>
+              </a:rPr>
+              <a:t>Der 50%-Plan = deine minimale Woche</a:t>
+            </a:r>
+          </a:p>
+        </p:txBody>
+      </p:sp>
+      <p:sp>
+        <p:nvSpPr>
+          <p:cNvPr id="3" name="TextBox 2"/>
+          <p:cNvSpPr txBox="1"/>
+          <p:nvPr/>
+        </p:nvSpPr>
+        <p:spPr>
+          <a:xfrm>
+            <a:off x="548640" y="1417320"/>
+            <a:ext cx="8046720" cy="3154680"/>
+          </a:xfrm>
+          <a:prstGeom prst="rect">
+            <a:avLst/>
+          </a:prstGeom>
+          <a:noFill/>
+        </p:spPr>
+        <p:txBody>
+          <a:bodyPr wrap="square" anchor="t" lIns="0" rIns="0" tIns="0" bIns="0">
+            <a:spAutoFit/>
+          </a:bodyPr>
+          <a:lstStyle/>
+          <a:p>
+            <a:pPr>
               <a:spcBef>
                 <a:spcPts val="0"/>
               </a:spcBef>
@@ -4680,13 +5255,51 @@
               </a:spcAft>
             </a:pPr>
             <a:r>
-              <a:rPr sz="3200" b="1" i="0">
-                <a:solidFill>
-                  <a:srgbClr val="1F6F6B"/>
+              <a:rPr sz="2100" b="1" i="0">
+                <a:solidFill>
+                  <a:srgbClr val="1A3A4A"/>
                 </a:solidFill>
                 <a:latin typeface="Georgia"/>
               </a:rPr>
-              <a:t>Der 50%-Plan = deine minimale Woche</a:t>
+              <a:t>Nur das, was wirklich nicht warten kann.</a:t>
+            </a:r>
+          </a:p>
+          <a:p>
+            <a:pPr>
+              <a:spcBef>
+                <a:spcPts val="0"/>
+              </a:spcBef>
+              <a:spcAft>
+                <a:spcPts val="900"/>
+              </a:spcAft>
+            </a:pPr>
+            <a:r>
+              <a:rPr sz="1600" b="0" i="0">
+                <a:solidFill>
+                  <a:srgbClr val="2C3E50"/>
+                </a:solidFill>
+                <a:latin typeface="Calibri"/>
+              </a:rPr>
+              <a:t>Meistens: deine Kundinnen nicht hängen lassen.</a:t>
+            </a:r>
+          </a:p>
+          <a:p>
+            <a:pPr>
+              <a:spcBef>
+                <a:spcPts val="0"/>
+              </a:spcBef>
+              <a:spcAft>
+                <a:spcPts val="800"/>
+              </a:spcAft>
+            </a:pPr>
+            <a:r>
+              <a:rPr sz="1400" b="0" i="1">
+                <a:solidFill>
+                  <a:srgbClr val="7A8A95"/>
+                </a:solidFill>
+                <a:latin typeface="Calibri"/>
+              </a:rPr>
+              <a:t>Alles andere darf warten — keine Niederlage, sondern kluge Führung.</a:t>
             </a:r>
           </a:p>
         </p:txBody>
@@ -4699,8 +5312,8 @@
         </p:nvSpPr>
         <p:spPr>
           <a:xfrm>
-            <a:off x="868680" y="1783080"/>
-            <a:ext cx="10424160" cy="4572000"/>
+            <a:off x="457200" y="4754880"/>
+            <a:ext cx="5486400" cy="274320"/>
           </a:xfrm>
           <a:prstGeom prst="rect">
             <a:avLst/>
@@ -4713,60 +5326,49 @@
           </a:bodyPr>
           <a:lstStyle/>
           <a:p>
-            <a:pPr algn="l">
-              <a:spcBef>
-                <a:spcPts val="0"/>
-              </a:spcBef>
-              <a:spcAft>
-                <a:spcPts val="1400"/>
-              </a:spcAft>
-            </a:pPr>
-            <a:r>
-              <a:rPr sz="2600" b="1" i="0">
-                <a:solidFill>
-                  <a:srgbClr val="2A2A2A"/>
-                </a:solidFill>
-                <a:latin typeface="Georgia"/>
-              </a:rPr>
-              <a:t>Nur das, was wirklich nicht warten kann.</a:t>
-            </a:r>
-          </a:p>
-          <a:p>
-            <a:pPr algn="l">
-              <a:spcBef>
-                <a:spcPts val="0"/>
-              </a:spcBef>
-              <a:spcAft>
-                <a:spcPts val="1400"/>
-              </a:spcAft>
-            </a:pPr>
-            <a:r>
-              <a:rPr sz="2100" b="0" i="0">
-                <a:solidFill>
-                  <a:srgbClr val="2A2A2A"/>
+            <a:r>
+              <a:rPr sz="900" b="0" i="0">
+                <a:solidFill>
+                  <a:srgbClr val="7A8A95"/>
                 </a:solidFill>
                 <a:latin typeface="Calibri"/>
               </a:rPr>
-              <a:t>Meistens: deine Kundinnen nicht hängen lassen.</a:t>
-            </a:r>
-          </a:p>
-          <a:p>
-            <a:pPr algn="l">
-              <a:spcBef>
-                <a:spcPts val="0"/>
-              </a:spcBef>
-              <a:spcAft>
-                <a:spcPts val="1400"/>
-              </a:spcAft>
-            </a:pPr>
-            <a:r>
-              <a:rPr sz="2000" b="0" i="1">
-                <a:solidFill>
-                  <a:srgbClr val="6E6E6E"/>
+              <a:t>Mama-CEO · Säule 3 · Lektion 3.6</a:t>
+            </a:r>
+          </a:p>
+        </p:txBody>
+      </p:sp>
+      <p:sp>
+        <p:nvSpPr>
+          <p:cNvPr id="5" name="TextBox 4"/>
+          <p:cNvSpPr txBox="1"/>
+          <p:nvPr/>
+        </p:nvSpPr>
+        <p:spPr>
+          <a:xfrm>
+            <a:off x="6400800" y="4754880"/>
+            <a:ext cx="2286000" cy="274320"/>
+          </a:xfrm>
+          <a:prstGeom prst="rect">
+            <a:avLst/>
+          </a:prstGeom>
+          <a:noFill/>
+        </p:spPr>
+        <p:txBody>
+          <a:bodyPr wrap="square" anchor="t" lIns="0" rIns="0" tIns="0" bIns="0">
+            <a:spAutoFit/>
+          </a:bodyPr>
+          <a:lstStyle/>
+          <a:p>
+            <a:pPr algn="r"/>
+            <a:r>
+              <a:rPr sz="900" b="0" i="0">
+                <a:solidFill>
+                  <a:srgbClr val="7A8A95"/>
                 </a:solidFill>
                 <a:latin typeface="Calibri"/>
               </a:rPr>
-              <a:t>Alles andere darf warten — das ist keine Niederlage, das ist kluge Führung.</a:t>
+              <a:t>Mum Life Balance</a:t>
             </a:r>
           </a:p>
         </p:txBody>
@@ -4799,58 +5401,14 @@
       <p:grpSpPr/>
       <p:sp>
         <p:nvSpPr>
-          <p:cNvPr id="2" name="Rectangle 1"/>
-          <p:cNvSpPr/>
-          <p:nvPr/>
-        </p:nvSpPr>
-        <p:spPr>
-          <a:xfrm>
-            <a:off x="548640" y="502920"/>
-            <a:ext cx="201168" cy="201168"/>
-          </a:xfrm>
-          <a:prstGeom prst="rect">
-            <a:avLst/>
-          </a:prstGeom>
-          <a:solidFill>
-            <a:srgbClr val="1F6F6B"/>
-          </a:solidFill>
-          <a:ln>
-            <a:noFill/>
-          </a:ln>
-          <a:effectLst/>
-        </p:spPr>
-        <p:style>
-          <a:lnRef idx="1">
-            <a:schemeClr val="accent1"/>
-          </a:lnRef>
-          <a:fillRef idx="3">
-            <a:schemeClr val="accent1"/>
-          </a:fillRef>
-          <a:effectRef idx="2">
-            <a:schemeClr val="accent1"/>
-          </a:effectRef>
-          <a:fontRef idx="minor">
-            <a:schemeClr val="lt1"/>
-          </a:fontRef>
-        </p:style>
-        <p:txBody>
-          <a:bodyPr rtlCol="0" anchor="ctr"/>
-          <a:lstStyle/>
-          <a:p>
-            <a:pPr algn="ctr"/>
-          </a:p>
-        </p:txBody>
-      </p:sp>
-      <p:sp>
-        <p:nvSpPr>
-          <p:cNvPr id="3" name="TextBox 2"/>
+          <p:cNvPr id="2" name="TextBox 1"/>
           <p:cNvSpPr txBox="1"/>
           <p:nvPr/>
         </p:nvSpPr>
         <p:spPr>
           <a:xfrm>
-            <a:off x="868680" y="457200"/>
-            <a:ext cx="10424160" cy="1005840"/>
+            <a:off x="548640" y="457200"/>
+            <a:ext cx="8046720" cy="914400"/>
           </a:xfrm>
           <a:prstGeom prst="rect">
             <a:avLst/>
@@ -4863,22 +5421,140 @@
           </a:bodyPr>
           <a:lstStyle/>
           <a:p>
-            <a:pPr algn="l">
+            <a:r>
+              <a:rPr sz="3000" b="1" i="0">
+                <a:solidFill>
+                  <a:srgbClr val="1A3A4A"/>
+                </a:solidFill>
+                <a:latin typeface="Georgia"/>
+              </a:rPr>
+              <a:t>Was BLEIBT im Notfall</a:t>
+            </a:r>
+          </a:p>
+        </p:txBody>
+      </p:sp>
+      <p:sp>
+        <p:nvSpPr>
+          <p:cNvPr id="3" name="TextBox 2"/>
+          <p:cNvSpPr txBox="1"/>
+          <p:nvPr/>
+        </p:nvSpPr>
+        <p:spPr>
+          <a:xfrm>
+            <a:off x="548640" y="1417320"/>
+            <a:ext cx="8046720" cy="3154680"/>
+          </a:xfrm>
+          <a:prstGeom prst="rect">
+            <a:avLst/>
+          </a:prstGeom>
+          <a:noFill/>
+        </p:spPr>
+        <p:txBody>
+          <a:bodyPr wrap="square" anchor="t" lIns="0" rIns="0" tIns="0" bIns="0">
+            <a:spAutoFit/>
+          </a:bodyPr>
+          <a:lstStyle/>
+          <a:p>
+            <a:pPr>
               <a:spcBef>
                 <a:spcPts val="0"/>
               </a:spcBef>
               <a:spcAft>
-                <a:spcPts val="1000"/>
+                <a:spcPts val="900"/>
               </a:spcAft>
             </a:pPr>
             <a:r>
-              <a:rPr sz="3200" b="1" i="0">
-                <a:solidFill>
-                  <a:srgbClr val="1F6F6B"/>
-                </a:solidFill>
-                <a:latin typeface="Georgia"/>
+              <a:rPr sz="1600" b="1" i="0">
+                <a:solidFill>
+                  <a:srgbClr val="12828C"/>
+                </a:solidFill>
+                <a:latin typeface="Calibri"/>
               </a:rPr>
-              <a:t>Was BLEIBT im Notfall</a:t>
+              <a:t>✓  </a:t>
+            </a:r>
+            <a:r>
+              <a:rPr sz="1600" b="0" i="0">
+                <a:solidFill>
+                  <a:srgbClr val="2C3E50"/>
+                </a:solidFill>
+                <a:latin typeface="Calibri"/>
+              </a:rPr>
+              <a:t>1× am Tag DMs + Mails checken</a:t>
+            </a:r>
+          </a:p>
+          <a:p>
+            <a:pPr>
+              <a:spcBef>
+                <a:spcPts val="0"/>
+              </a:spcBef>
+              <a:spcAft>
+                <a:spcPts val="900"/>
+              </a:spcAft>
+            </a:pPr>
+            <a:r>
+              <a:rPr sz="1600" b="1" i="0">
+                <a:solidFill>
+                  <a:srgbClr val="12828C"/>
+                </a:solidFill>
+                <a:latin typeface="Calibri"/>
+              </a:rPr>
+              <a:t>✓  </a:t>
+            </a:r>
+            <a:r>
+              <a:rPr sz="1600" b="0" i="0">
+                <a:solidFill>
+                  <a:srgbClr val="2C3E50"/>
+                </a:solidFill>
+                <a:latin typeface="Calibri"/>
+              </a:rPr>
+              <a:t>die 1 kritische Sache (z.B. laufender Launch)</a:t>
+            </a:r>
+          </a:p>
+          <a:p>
+            <a:pPr>
+              <a:spcBef>
+                <a:spcPts val="0"/>
+              </a:spcBef>
+              <a:spcAft>
+                <a:spcPts val="900"/>
+              </a:spcAft>
+            </a:pPr>
+            <a:r>
+              <a:rPr sz="1600" b="1" i="0">
+                <a:solidFill>
+                  <a:srgbClr val="12828C"/>
+                </a:solidFill>
+                <a:latin typeface="Calibri"/>
+              </a:rPr>
+              <a:t>✓  </a:t>
+            </a:r>
+            <a:r>
+              <a:rPr sz="1600" b="0" i="0">
+                <a:solidFill>
+                  <a:srgbClr val="2C3E50"/>
+                </a:solidFill>
+                <a:latin typeface="Calibri"/>
+              </a:rPr>
+              <a:t>Familie zuerst</a:t>
+            </a:r>
+          </a:p>
+          <a:p>
+            <a:pPr>
+              <a:spcBef>
+                <a:spcPts val="0"/>
+              </a:spcBef>
+              <a:spcAft>
+                <a:spcPts val="800"/>
+              </a:spcAft>
+            </a:pPr>
+            <a:r>
+              <a:rPr sz="1400" b="0" i="1">
+                <a:solidFill>
+                  <a:srgbClr val="7A8A95"/>
+                </a:solidFill>
+                <a:latin typeface="Calibri"/>
+              </a:rPr>
+              <a:t>Das ist die ganze minimale Woche.</a:t>
             </a:r>
           </a:p>
         </p:txBody>
@@ -4891,8 +5567,8 @@
         </p:nvSpPr>
         <p:spPr>
           <a:xfrm>
-            <a:off x="868680" y="1783080"/>
-            <a:ext cx="10424160" cy="4572000"/>
+            <a:off x="457200" y="4754880"/>
+            <a:ext cx="5486400" cy="274320"/>
           </a:xfrm>
           <a:prstGeom prst="rect">
             <a:avLst/>
@@ -4905,79 +5581,49 @@
           </a:bodyPr>
           <a:lstStyle/>
           <a:p>
-            <a:pPr algn="l">
-              <a:spcBef>
-                <a:spcPts val="0"/>
-              </a:spcBef>
-              <a:spcAft>
-                <a:spcPts val="1400"/>
-              </a:spcAft>
-            </a:pPr>
-            <a:r>
-              <a:rPr sz="2100" b="0" i="0">
-                <a:solidFill>
-                  <a:srgbClr val="2E7D57"/>
+            <a:r>
+              <a:rPr sz="900" b="0" i="0">
+                <a:solidFill>
+                  <a:srgbClr val="7A8A95"/>
                 </a:solidFill>
                 <a:latin typeface="Calibri"/>
               </a:rPr>
-              <a:t>✓  1× am Tag DMs + Mails checken</a:t>
-            </a:r>
-          </a:p>
-          <a:p>
-            <a:pPr algn="l">
-              <a:spcBef>
-                <a:spcPts val="0"/>
-              </a:spcBef>
-              <a:spcAft>
-                <a:spcPts val="1400"/>
-              </a:spcAft>
-            </a:pPr>
-            <a:r>
-              <a:rPr sz="2100" b="0" i="0">
-                <a:solidFill>
-                  <a:srgbClr val="2E7D57"/>
+              <a:t>Mama-CEO · Säule 3 · Lektion 3.6</a:t>
+            </a:r>
+          </a:p>
+        </p:txBody>
+      </p:sp>
+      <p:sp>
+        <p:nvSpPr>
+          <p:cNvPr id="5" name="TextBox 4"/>
+          <p:cNvSpPr txBox="1"/>
+          <p:nvPr/>
+        </p:nvSpPr>
+        <p:spPr>
+          <a:xfrm>
+            <a:off x="6400800" y="4754880"/>
+            <a:ext cx="2286000" cy="274320"/>
+          </a:xfrm>
+          <a:prstGeom prst="rect">
+            <a:avLst/>
+          </a:prstGeom>
+          <a:noFill/>
+        </p:spPr>
+        <p:txBody>
+          <a:bodyPr wrap="square" anchor="t" lIns="0" rIns="0" tIns="0" bIns="0">
+            <a:spAutoFit/>
+          </a:bodyPr>
+          <a:lstStyle/>
+          <a:p>
+            <a:pPr algn="r"/>
+            <a:r>
+              <a:rPr sz="900" b="0" i="0">
+                <a:solidFill>
+                  <a:srgbClr val="7A8A95"/>
                 </a:solidFill>
                 <a:latin typeface="Calibri"/>
               </a:rPr>
-              <a:t>✓  die 1 kritische Sache (z.B. laufender Launch)</a:t>
-            </a:r>
-          </a:p>
-          <a:p>
-            <a:pPr algn="l">
-              <a:spcBef>
-                <a:spcPts val="0"/>
-              </a:spcBef>
-              <a:spcAft>
-                <a:spcPts val="1400"/>
-              </a:spcAft>
-            </a:pPr>
-            <a:r>
-              <a:rPr sz="2100" b="0" i="0">
-                <a:solidFill>
-                  <a:srgbClr val="2E7D57"/>
-                </a:solidFill>
-                <a:latin typeface="Calibri"/>
-              </a:rPr>
-              <a:t>✓  Familie zuerst</a:t>
-            </a:r>
-          </a:p>
-          <a:p>
-            <a:pPr algn="l">
-              <a:spcBef>
-                <a:spcPts val="0"/>
-              </a:spcBef>
-              <a:spcAft>
-                <a:spcPts val="1400"/>
-              </a:spcAft>
-            </a:pPr>
-            <a:r>
-              <a:rPr sz="2000" b="0" i="1">
-                <a:solidFill>
-                  <a:srgbClr val="6E6E6E"/>
-                </a:solidFill>
-                <a:latin typeface="Calibri"/>
-              </a:rPr>
-              <a:t>Das ist die ganze minimale Woche.</a:t>
+              <a:t>Mum Life Balance</a:t>
             </a:r>
           </a:p>
         </p:txBody>
@@ -5010,58 +5656,14 @@
       <p:grpSpPr/>
       <p:sp>
         <p:nvSpPr>
-          <p:cNvPr id="2" name="Rectangle 1"/>
-          <p:cNvSpPr/>
-          <p:nvPr/>
-        </p:nvSpPr>
-        <p:spPr>
-          <a:xfrm>
-            <a:off x="548640" y="502920"/>
-            <a:ext cx="201168" cy="201168"/>
-          </a:xfrm>
-          <a:prstGeom prst="rect">
-            <a:avLst/>
-          </a:prstGeom>
-          <a:solidFill>
-            <a:srgbClr val="1F6F6B"/>
-          </a:solidFill>
-          <a:ln>
-            <a:noFill/>
-          </a:ln>
-          <a:effectLst/>
-        </p:spPr>
-        <p:style>
-          <a:lnRef idx="1">
-            <a:schemeClr val="accent1"/>
-          </a:lnRef>
-          <a:fillRef idx="3">
-            <a:schemeClr val="accent1"/>
-          </a:fillRef>
-          <a:effectRef idx="2">
-            <a:schemeClr val="accent1"/>
-          </a:effectRef>
-          <a:fontRef idx="minor">
-            <a:schemeClr val="lt1"/>
-          </a:fontRef>
-        </p:style>
-        <p:txBody>
-          <a:bodyPr rtlCol="0" anchor="ctr"/>
-          <a:lstStyle/>
-          <a:p>
-            <a:pPr algn="ctr"/>
-          </a:p>
-        </p:txBody>
-      </p:sp>
-      <p:sp>
-        <p:nvSpPr>
-          <p:cNvPr id="3" name="TextBox 2"/>
+          <p:cNvPr id="2" name="TextBox 1"/>
           <p:cNvSpPr txBox="1"/>
           <p:nvPr/>
         </p:nvSpPr>
         <p:spPr>
           <a:xfrm>
-            <a:off x="868680" y="457200"/>
-            <a:ext cx="10424160" cy="1005840"/>
+            <a:off x="548640" y="457200"/>
+            <a:ext cx="8046720" cy="914400"/>
           </a:xfrm>
           <a:prstGeom prst="rect">
             <a:avLst/>
@@ -5074,22 +5676,140 @@
           </a:bodyPr>
           <a:lstStyle/>
           <a:p>
-            <a:pPr algn="l">
+            <a:r>
+              <a:rPr sz="3000" b="1" i="0">
+                <a:solidFill>
+                  <a:srgbClr val="1A3A4A"/>
+                </a:solidFill>
+                <a:latin typeface="Georgia"/>
+              </a:rPr>
+              <a:t>Was PAUSIERT im Notfall</a:t>
+            </a:r>
+          </a:p>
+        </p:txBody>
+      </p:sp>
+      <p:sp>
+        <p:nvSpPr>
+          <p:cNvPr id="3" name="TextBox 2"/>
+          <p:cNvSpPr txBox="1"/>
+          <p:nvPr/>
+        </p:nvSpPr>
+        <p:spPr>
+          <a:xfrm>
+            <a:off x="548640" y="1417320"/>
+            <a:ext cx="8046720" cy="3154680"/>
+          </a:xfrm>
+          <a:prstGeom prst="rect">
+            <a:avLst/>
+          </a:prstGeom>
+          <a:noFill/>
+        </p:spPr>
+        <p:txBody>
+          <a:bodyPr wrap="square" anchor="t" lIns="0" rIns="0" tIns="0" bIns="0">
+            <a:spAutoFit/>
+          </a:bodyPr>
+          <a:lstStyle/>
+          <a:p>
+            <a:pPr>
               <a:spcBef>
                 <a:spcPts val="0"/>
               </a:spcBef>
               <a:spcAft>
-                <a:spcPts val="1000"/>
+                <a:spcPts val="900"/>
               </a:spcAft>
             </a:pPr>
             <a:r>
-              <a:rPr sz="3200" b="1" i="0">
-                <a:solidFill>
-                  <a:srgbClr val="1F6F6B"/>
-                </a:solidFill>
-                <a:latin typeface="Georgia"/>
+              <a:rPr sz="1600" b="1" i="0">
+                <a:solidFill>
+                  <a:srgbClr val="7A8A95"/>
+                </a:solidFill>
+                <a:latin typeface="Calibri"/>
               </a:rPr>
-              <a:t>Was PAUSIERT im Notfall</a:t>
+              <a:t>✗  </a:t>
+            </a:r>
+            <a:r>
+              <a:rPr sz="1600" b="0" i="0">
+                <a:solidFill>
+                  <a:srgbClr val="7A8A95"/>
+                </a:solidFill>
+                <a:latin typeface="Calibri"/>
+              </a:rPr>
+              <a:t>Produkterstellung</a:t>
+            </a:r>
+          </a:p>
+          <a:p>
+            <a:pPr>
+              <a:spcBef>
+                <a:spcPts val="0"/>
+              </a:spcBef>
+              <a:spcAft>
+                <a:spcPts val="900"/>
+              </a:spcAft>
+            </a:pPr>
+            <a:r>
+              <a:rPr sz="1600" b="1" i="0">
+                <a:solidFill>
+                  <a:srgbClr val="7A8A95"/>
+                </a:solidFill>
+                <a:latin typeface="Calibri"/>
+              </a:rPr>
+              <a:t>✗  </a:t>
+            </a:r>
+            <a:r>
+              <a:rPr sz="1600" b="0" i="0">
+                <a:solidFill>
+                  <a:srgbClr val="7A8A95"/>
+                </a:solidFill>
+                <a:latin typeface="Calibri"/>
+              </a:rPr>
+              <a:t>neuer Content</a:t>
+            </a:r>
+          </a:p>
+          <a:p>
+            <a:pPr>
+              <a:spcBef>
+                <a:spcPts val="0"/>
+              </a:spcBef>
+              <a:spcAft>
+                <a:spcPts val="900"/>
+              </a:spcAft>
+            </a:pPr>
+            <a:r>
+              <a:rPr sz="1600" b="1" i="0">
+                <a:solidFill>
+                  <a:srgbClr val="7A8A95"/>
+                </a:solidFill>
+                <a:latin typeface="Calibri"/>
+              </a:rPr>
+              <a:t>✗  </a:t>
+            </a:r>
+            <a:r>
+              <a:rPr sz="1600" b="0" i="0">
+                <a:solidFill>
+                  <a:srgbClr val="7A8A95"/>
+                </a:solidFill>
+                <a:latin typeface="Calibri"/>
+              </a:rPr>
+              <a:t>grosse Strategie-Arbeit</a:t>
+            </a:r>
+          </a:p>
+          <a:p>
+            <a:pPr>
+              <a:spcBef>
+                <a:spcPts val="0"/>
+              </a:spcBef>
+              <a:spcAft>
+                <a:spcPts val="800"/>
+              </a:spcAft>
+            </a:pPr>
+            <a:r>
+              <a:rPr sz="1400" b="0" i="1">
+                <a:solidFill>
+                  <a:srgbClr val="7A8A95"/>
+                </a:solidFill>
+                <a:latin typeface="Calibri"/>
+              </a:rPr>
+              <a:t>Läuft nicht weg — darf warten, bis der Sturm vorbei ist.</a:t>
             </a:r>
           </a:p>
         </p:txBody>
@@ -5102,8 +5822,8 @@
         </p:nvSpPr>
         <p:spPr>
           <a:xfrm>
-            <a:off x="868680" y="1783080"/>
-            <a:ext cx="10424160" cy="4572000"/>
+            <a:off x="457200" y="4754880"/>
+            <a:ext cx="5486400" cy="274320"/>
           </a:xfrm>
           <a:prstGeom prst="rect">
             <a:avLst/>
@@ -5116,79 +5836,49 @@
           </a:bodyPr>
           <a:lstStyle/>
           <a:p>
-            <a:pPr algn="l">
-              <a:spcBef>
-                <a:spcPts val="0"/>
-              </a:spcBef>
-              <a:spcAft>
-                <a:spcPts val="1400"/>
-              </a:spcAft>
-            </a:pPr>
-            <a:r>
-              <a:rPr sz="2100" b="0" i="0">
-                <a:solidFill>
-                  <a:srgbClr val="B85042"/>
+            <a:r>
+              <a:rPr sz="900" b="0" i="0">
+                <a:solidFill>
+                  <a:srgbClr val="7A8A95"/>
                 </a:solidFill>
                 <a:latin typeface="Calibri"/>
               </a:rPr>
-              <a:t>✗  Produkterstellung</a:t>
-            </a:r>
-          </a:p>
-          <a:p>
-            <a:pPr algn="l">
-              <a:spcBef>
-                <a:spcPts val="0"/>
-              </a:spcBef>
-              <a:spcAft>
-                <a:spcPts val="1400"/>
-              </a:spcAft>
-            </a:pPr>
-            <a:r>
-              <a:rPr sz="2100" b="0" i="0">
-                <a:solidFill>
-                  <a:srgbClr val="B85042"/>
+              <a:t>Mama-CEO · Säule 3 · Lektion 3.6</a:t>
+            </a:r>
+          </a:p>
+        </p:txBody>
+      </p:sp>
+      <p:sp>
+        <p:nvSpPr>
+          <p:cNvPr id="5" name="TextBox 4"/>
+          <p:cNvSpPr txBox="1"/>
+          <p:nvPr/>
+        </p:nvSpPr>
+        <p:spPr>
+          <a:xfrm>
+            <a:off x="6400800" y="4754880"/>
+            <a:ext cx="2286000" cy="274320"/>
+          </a:xfrm>
+          <a:prstGeom prst="rect">
+            <a:avLst/>
+          </a:prstGeom>
+          <a:noFill/>
+        </p:spPr>
+        <p:txBody>
+          <a:bodyPr wrap="square" anchor="t" lIns="0" rIns="0" tIns="0" bIns="0">
+            <a:spAutoFit/>
+          </a:bodyPr>
+          <a:lstStyle/>
+          <a:p>
+            <a:pPr algn="r"/>
+            <a:r>
+              <a:rPr sz="900" b="0" i="0">
+                <a:solidFill>
+                  <a:srgbClr val="7A8A95"/>
                 </a:solidFill>
                 <a:latin typeface="Calibri"/>
               </a:rPr>
-              <a:t>✗  neuer Content</a:t>
-            </a:r>
-          </a:p>
-          <a:p>
-            <a:pPr algn="l">
-              <a:spcBef>
-                <a:spcPts val="0"/>
-              </a:spcBef>
-              <a:spcAft>
-                <a:spcPts val="1400"/>
-              </a:spcAft>
-            </a:pPr>
-            <a:r>
-              <a:rPr sz="2100" b="0" i="0">
-                <a:solidFill>
-                  <a:srgbClr val="B85042"/>
-                </a:solidFill>
-                <a:latin typeface="Calibri"/>
-              </a:rPr>
-              <a:t>✗  grosse Strategie-Arbeit</a:t>
-            </a:r>
-          </a:p>
-          <a:p>
-            <a:pPr algn="l">
-              <a:spcBef>
-                <a:spcPts val="0"/>
-              </a:spcBef>
-              <a:spcAft>
-                <a:spcPts val="1400"/>
-              </a:spcAft>
-            </a:pPr>
-            <a:r>
-              <a:rPr sz="2000" b="0" i="1">
-                <a:solidFill>
-                  <a:srgbClr val="6E6E6E"/>
-                </a:solidFill>
-                <a:latin typeface="Calibri"/>
-              </a:rPr>
-              <a:t>Läuft nicht weg — darf warten, bis der Sturm vorbei ist.</a:t>
+              <a:t>Mum Life Balance</a:t>
             </a:r>
           </a:p>
         </p:txBody>
@@ -5221,58 +5911,14 @@
       <p:grpSpPr/>
       <p:sp>
         <p:nvSpPr>
-          <p:cNvPr id="2" name="Rectangle 1"/>
-          <p:cNvSpPr/>
-          <p:nvPr/>
-        </p:nvSpPr>
-        <p:spPr>
-          <a:xfrm>
-            <a:off x="548640" y="502920"/>
-            <a:ext cx="201168" cy="201168"/>
-          </a:xfrm>
-          <a:prstGeom prst="rect">
-            <a:avLst/>
-          </a:prstGeom>
-          <a:solidFill>
-            <a:srgbClr val="1F6F6B"/>
-          </a:solidFill>
-          <a:ln>
-            <a:noFill/>
-          </a:ln>
-          <a:effectLst/>
-        </p:spPr>
-        <p:style>
-          <a:lnRef idx="1">
-            <a:schemeClr val="accent1"/>
-          </a:lnRef>
-          <a:fillRef idx="3">
-            <a:schemeClr val="accent1"/>
-          </a:fillRef>
-          <a:effectRef idx="2">
-            <a:schemeClr val="accent1"/>
-          </a:effectRef>
-          <a:fontRef idx="minor">
-            <a:schemeClr val="lt1"/>
-          </a:fontRef>
-        </p:style>
-        <p:txBody>
-          <a:bodyPr rtlCol="0" anchor="ctr"/>
-          <a:lstStyle/>
-          <a:p>
-            <a:pPr algn="ctr"/>
-          </a:p>
-        </p:txBody>
-      </p:sp>
-      <p:sp>
-        <p:nvSpPr>
-          <p:cNvPr id="3" name="TextBox 2"/>
+          <p:cNvPr id="2" name="TextBox 1"/>
           <p:cNvSpPr txBox="1"/>
           <p:nvPr/>
         </p:nvSpPr>
         <p:spPr>
           <a:xfrm>
-            <a:off x="868680" y="457200"/>
-            <a:ext cx="10424160" cy="1005840"/>
+            <a:off x="548640" y="457200"/>
+            <a:ext cx="8046720" cy="914400"/>
           </a:xfrm>
           <a:prstGeom prst="rect">
             <a:avLst/>
@@ -5285,22 +5931,94 @@
           </a:bodyPr>
           <a:lstStyle/>
           <a:p>
-            <a:pPr algn="l">
+            <a:r>
+              <a:rPr sz="3000" b="1" i="0">
+                <a:solidFill>
+                  <a:srgbClr val="1A3A4A"/>
+                </a:solidFill>
+                <a:latin typeface="Georgia"/>
+              </a:rPr>
+              <a:t>Stories laufen weiter — vorgeplant</a:t>
+            </a:r>
+          </a:p>
+        </p:txBody>
+      </p:sp>
+      <p:sp>
+        <p:nvSpPr>
+          <p:cNvPr id="3" name="TextBox 2"/>
+          <p:cNvSpPr txBox="1"/>
+          <p:nvPr/>
+        </p:nvSpPr>
+        <p:spPr>
+          <a:xfrm>
+            <a:off x="548640" y="1417320"/>
+            <a:ext cx="8046720" cy="3154680"/>
+          </a:xfrm>
+          <a:prstGeom prst="rect">
+            <a:avLst/>
+          </a:prstGeom>
+          <a:noFill/>
+        </p:spPr>
+        <p:txBody>
+          <a:bodyPr wrap="square" anchor="t" lIns="0" rIns="0" tIns="0" bIns="0">
+            <a:spAutoFit/>
+          </a:bodyPr>
+          <a:lstStyle/>
+          <a:p>
+            <a:pPr>
               <a:spcBef>
                 <a:spcPts val="0"/>
               </a:spcBef>
               <a:spcAft>
-                <a:spcPts val="1000"/>
+                <a:spcPts val="900"/>
               </a:spcAft>
             </a:pPr>
             <a:r>
-              <a:rPr sz="3200" b="1" i="0">
-                <a:solidFill>
-                  <a:srgbClr val="1F6F6B"/>
-                </a:solidFill>
-                <a:latin typeface="Georgia"/>
+              <a:rPr sz="1600" b="0" i="0">
+                <a:solidFill>
+                  <a:srgbClr val="2C3E50"/>
+                </a:solidFill>
+                <a:latin typeface="Calibri"/>
               </a:rPr>
-              <a:t>Stories laufen weiter — vorgeplant</a:t>
+              <a:t>Vorgeplant oder als Template — in 5 Min vom Sofa.</a:t>
+            </a:r>
+          </a:p>
+          <a:p>
+            <a:pPr>
+              <a:spcBef>
+                <a:spcPts val="0"/>
+              </a:spcBef>
+              <a:spcAft>
+                <a:spcPts val="900"/>
+              </a:spcAft>
+            </a:pPr>
+            <a:r>
+              <a:rPr sz="1600" b="0" i="0">
+                <a:solidFill>
+                  <a:srgbClr val="2C3E50"/>
+                </a:solidFill>
+                <a:latin typeface="Calibri"/>
+              </a:rPr>
+              <a:t>Deine Sichtbarkeit bricht nicht weg, nur weil du am Kinderbett sitzt.</a:t>
+            </a:r>
+          </a:p>
+          <a:p>
+            <a:pPr>
+              <a:spcBef>
+                <a:spcPts val="0"/>
+              </a:spcBef>
+              <a:spcAft>
+                <a:spcPts val="800"/>
+              </a:spcAft>
+            </a:pPr>
+            <a:r>
+              <a:rPr sz="1400" b="0" i="1">
+                <a:solidFill>
+                  <a:srgbClr val="7A8A95"/>
+                </a:solidFill>
+                <a:latin typeface="Calibri"/>
+              </a:rPr>
+              <a:t>(Wie du eine Story-Strategie aufsetzt, lernst du in der Insta-Kundenmaschine.)</a:t>
             </a:r>
           </a:p>
         </p:txBody>
@@ -5313,8 +6031,8 @@
         </p:nvSpPr>
         <p:spPr>
           <a:xfrm>
-            <a:off x="868680" y="1783080"/>
-            <a:ext cx="10424160" cy="4572000"/>
+            <a:off x="457200" y="4754880"/>
+            <a:ext cx="5486400" cy="274320"/>
           </a:xfrm>
           <a:prstGeom prst="rect">
             <a:avLst/>
@@ -5327,60 +6045,49 @@
           </a:bodyPr>
           <a:lstStyle/>
           <a:p>
-            <a:pPr algn="l">
-              <a:spcBef>
-                <a:spcPts val="0"/>
-              </a:spcBef>
-              <a:spcAft>
-                <a:spcPts val="1400"/>
-              </a:spcAft>
-            </a:pPr>
-            <a:r>
-              <a:rPr sz="2100" b="0" i="0">
-                <a:solidFill>
-                  <a:srgbClr val="2A2A2A"/>
+            <a:r>
+              <a:rPr sz="900" b="0" i="0">
+                <a:solidFill>
+                  <a:srgbClr val="7A8A95"/>
                 </a:solidFill>
                 <a:latin typeface="Calibri"/>
               </a:rPr>
-              <a:t>Vorgeplant oder als Template — in 5 Min vom Sofa.</a:t>
-            </a:r>
-          </a:p>
-          <a:p>
-            <a:pPr algn="l">
-              <a:spcBef>
-                <a:spcPts val="0"/>
-              </a:spcBef>
-              <a:spcAft>
-                <a:spcPts val="1400"/>
-              </a:spcAft>
-            </a:pPr>
-            <a:r>
-              <a:rPr sz="2100" b="0" i="0">
-                <a:solidFill>
-                  <a:srgbClr val="2A2A2A"/>
+              <a:t>Mama-CEO · Säule 3 · Lektion 3.6</a:t>
+            </a:r>
+          </a:p>
+        </p:txBody>
+      </p:sp>
+      <p:sp>
+        <p:nvSpPr>
+          <p:cNvPr id="5" name="TextBox 4"/>
+          <p:cNvSpPr txBox="1"/>
+          <p:nvPr/>
+        </p:nvSpPr>
+        <p:spPr>
+          <a:xfrm>
+            <a:off x="6400800" y="4754880"/>
+            <a:ext cx="2286000" cy="274320"/>
+          </a:xfrm>
+          <a:prstGeom prst="rect">
+            <a:avLst/>
+          </a:prstGeom>
+          <a:noFill/>
+        </p:spPr>
+        <p:txBody>
+          <a:bodyPr wrap="square" anchor="t" lIns="0" rIns="0" tIns="0" bIns="0">
+            <a:spAutoFit/>
+          </a:bodyPr>
+          <a:lstStyle/>
+          <a:p>
+            <a:pPr algn="r"/>
+            <a:r>
+              <a:rPr sz="900" b="0" i="0">
+                <a:solidFill>
+                  <a:srgbClr val="7A8A95"/>
                 </a:solidFill>
                 <a:latin typeface="Calibri"/>
               </a:rPr>
-              <a:t>Deine Sichtbarkeit bricht nicht weg, nur weil du am Kinderbett sitzt.</a:t>
-            </a:r>
-          </a:p>
-          <a:p>
-            <a:pPr algn="l">
-              <a:spcBef>
-                <a:spcPts val="0"/>
-              </a:spcBef>
-              <a:spcAft>
-                <a:spcPts val="1400"/>
-              </a:spcAft>
-            </a:pPr>
-            <a:r>
-              <a:rPr sz="1700" b="0" i="0">
-                <a:solidFill>
-                  <a:srgbClr val="6E6E6E"/>
-                </a:solidFill>
-                <a:latin typeface="Calibri"/>
-              </a:rPr>
-              <a:t>(Wie du eine Story-Strategie aufsetzt, lernst du in der Insta-Kundenmaschine.)</a:t>
+              <a:t>Mum Life Balance</a:t>
             </a:r>
           </a:p>
         </p:txBody>
@@ -5413,20 +6120,263 @@
       <p:grpSpPr/>
       <p:sp>
         <p:nvSpPr>
-          <p:cNvPr id="2" name="Rectangle 1"/>
+          <p:cNvPr id="2" name="TextBox 1"/>
+          <p:cNvSpPr txBox="1"/>
+          <p:nvPr/>
+        </p:nvSpPr>
+        <p:spPr>
+          <a:xfrm>
+            <a:off x="548640" y="457200"/>
+            <a:ext cx="8046720" cy="914400"/>
+          </a:xfrm>
+          <a:prstGeom prst="rect">
+            <a:avLst/>
+          </a:prstGeom>
+          <a:noFill/>
+        </p:spPr>
+        <p:txBody>
+          <a:bodyPr wrap="square" anchor="t" lIns="0" rIns="0" tIns="0" bIns="0">
+            <a:spAutoFit/>
+          </a:bodyPr>
+          <a:lstStyle/>
+          <a:p>
+            <a:r>
+              <a:rPr sz="3000" b="1" i="0">
+                <a:solidFill>
+                  <a:srgbClr val="1A3A4A"/>
+                </a:solidFill>
+                <a:latin typeface="Georgia"/>
+              </a:rPr>
+              <a:t>Dein Wochenplan gibt Sicherheit</a:t>
+            </a:r>
+          </a:p>
+        </p:txBody>
+      </p:sp>
+      <p:sp>
+        <p:nvSpPr>
+          <p:cNvPr id="3" name="TextBox 2"/>
+          <p:cNvSpPr txBox="1"/>
+          <p:nvPr/>
+        </p:nvSpPr>
+        <p:spPr>
+          <a:xfrm>
+            <a:off x="548640" y="1417320"/>
+            <a:ext cx="8046720" cy="3154680"/>
+          </a:xfrm>
+          <a:prstGeom prst="rect">
+            <a:avLst/>
+          </a:prstGeom>
+          <a:noFill/>
+        </p:spPr>
+        <p:txBody>
+          <a:bodyPr wrap="square" anchor="t" lIns="0" rIns="0" tIns="0" bIns="0">
+            <a:spAutoFit/>
+          </a:bodyPr>
+          <a:lstStyle/>
+          <a:p>
+            <a:pPr>
+              <a:spcBef>
+                <a:spcPts val="0"/>
+              </a:spcBef>
+              <a:spcAft>
+                <a:spcPts val="1000"/>
+              </a:spcAft>
+            </a:pPr>
+            <a:r>
+              <a:rPr sz="2100" b="1" i="0">
+                <a:solidFill>
+                  <a:srgbClr val="1A3A4A"/>
+                </a:solidFill>
+                <a:latin typeface="Georgia"/>
+              </a:rPr>
+              <a:t>Auch im Chaos weisst du, wie's morgen weitergeht.</a:t>
+            </a:r>
+          </a:p>
+          <a:p>
+            <a:pPr>
+              <a:spcBef>
+                <a:spcPts val="0"/>
+              </a:spcBef>
+              <a:spcAft>
+                <a:spcPts val="900"/>
+              </a:spcAft>
+            </a:pPr>
+            <a:r>
+              <a:rPr sz="1600" b="0" i="0">
+                <a:solidFill>
+                  <a:srgbClr val="2C3E50"/>
+                </a:solidFill>
+                <a:latin typeface="Calibri"/>
+              </a:rPr>
+              <a:t>Es steht schon drin — du musst nichts neu erfinden.</a:t>
+            </a:r>
+          </a:p>
+          <a:p>
+            <a:pPr>
+              <a:spcBef>
+                <a:spcPts val="0"/>
+              </a:spcBef>
+              <a:spcAft>
+                <a:spcPts val="800"/>
+              </a:spcAft>
+            </a:pPr>
+            <a:r>
+              <a:rPr sz="1400" b="0" i="1">
+                <a:solidFill>
+                  <a:srgbClr val="7A8A95"/>
+                </a:solidFill>
+                <a:latin typeface="Calibri"/>
+              </a:rPr>
+              <a:t>Später nimmt dir der Cockpit-Bot (Säule 4) sogar das Reinschauen ab.</a:t>
+            </a:r>
+          </a:p>
+        </p:txBody>
+      </p:sp>
+      <p:sp>
+        <p:nvSpPr>
+          <p:cNvPr id="4" name="TextBox 3"/>
+          <p:cNvSpPr txBox="1"/>
+          <p:nvPr/>
+        </p:nvSpPr>
+        <p:spPr>
+          <a:xfrm>
+            <a:off x="457200" y="4754880"/>
+            <a:ext cx="5486400" cy="274320"/>
+          </a:xfrm>
+          <a:prstGeom prst="rect">
+            <a:avLst/>
+          </a:prstGeom>
+          <a:noFill/>
+        </p:spPr>
+        <p:txBody>
+          <a:bodyPr wrap="square" anchor="t" lIns="0" rIns="0" tIns="0" bIns="0">
+            <a:spAutoFit/>
+          </a:bodyPr>
+          <a:lstStyle/>
+          <a:p>
+            <a:r>
+              <a:rPr sz="900" b="0" i="0">
+                <a:solidFill>
+                  <a:srgbClr val="7A8A95"/>
+                </a:solidFill>
+                <a:latin typeface="Calibri"/>
+              </a:rPr>
+              <a:t>Mama-CEO · Säule 3 · Lektion 3.6</a:t>
+            </a:r>
+          </a:p>
+        </p:txBody>
+      </p:sp>
+      <p:sp>
+        <p:nvSpPr>
+          <p:cNvPr id="5" name="TextBox 4"/>
+          <p:cNvSpPr txBox="1"/>
+          <p:nvPr/>
+        </p:nvSpPr>
+        <p:spPr>
+          <a:xfrm>
+            <a:off x="6400800" y="4754880"/>
+            <a:ext cx="2286000" cy="274320"/>
+          </a:xfrm>
+          <a:prstGeom prst="rect">
+            <a:avLst/>
+          </a:prstGeom>
+          <a:noFill/>
+        </p:spPr>
+        <p:txBody>
+          <a:bodyPr wrap="square" anchor="t" lIns="0" rIns="0" tIns="0" bIns="0">
+            <a:spAutoFit/>
+          </a:bodyPr>
+          <a:lstStyle/>
+          <a:p>
+            <a:pPr algn="r"/>
+            <a:r>
+              <a:rPr sz="900" b="0" i="0">
+                <a:solidFill>
+                  <a:srgbClr val="7A8A95"/>
+                </a:solidFill>
+                <a:latin typeface="Calibri"/>
+              </a:rPr>
+              <a:t>Mum Life Balance</a:t>
+            </a:r>
+          </a:p>
+        </p:txBody>
+      </p:sp>
+    </p:spTree>
+  </p:cSld>
+  <p:clrMapOvr>
+    <a:masterClrMapping/>
+  </p:clrMapOvr>
+</p:sld>
+</file>
+
+<file path=ppt/slides/slide8.xml><?xml version="1.0" encoding="utf-8"?>
+<p:sld xmlns:a="http://schemas.openxmlformats.org/drawingml/2006/main" xmlns:p="http://schemas.openxmlformats.org/presentationml/2006/main" xmlns:r="http://schemas.openxmlformats.org/officeDocument/2006/relationships">
+  <p:cSld>
+    <p:bg>
+      <p:bgPr>
+        <a:solidFill>
+          <a:srgbClr val="12828C"/>
+        </a:solidFill>
+        <a:effectLst/>
+      </p:bgPr>
+    </p:bg>
+    <p:spTree>
+      <p:nvGrpSpPr>
+        <p:cNvPr id="1" name=""/>
+        <p:cNvGrpSpPr/>
+        <p:nvPr/>
+      </p:nvGrpSpPr>
+      <p:grpSpPr/>
+      <p:sp>
+        <p:nvSpPr>
+          <p:cNvPr id="2" name="TextBox 1"/>
+          <p:cNvSpPr txBox="1"/>
+          <p:nvPr/>
+        </p:nvSpPr>
+        <p:spPr>
+          <a:xfrm>
+            <a:off x="548640" y="1097280"/>
+            <a:ext cx="8046720" cy="365760"/>
+          </a:xfrm>
+          <a:prstGeom prst="rect">
+            <a:avLst/>
+          </a:prstGeom>
+          <a:noFill/>
+        </p:spPr>
+        <p:txBody>
+          <a:bodyPr wrap="square" anchor="t" lIns="0" rIns="0" tIns="0" bIns="0">
+            <a:spAutoFit/>
+          </a:bodyPr>
+          <a:lstStyle/>
+          <a:p>
+            <a:r>
+              <a:rPr sz="1100" b="1" i="0">
+                <a:solidFill>
+                  <a:srgbClr val="DC822E"/>
+                </a:solidFill>
+                <a:latin typeface="Calibri"/>
+              </a:rPr>
+              <a:t>MEIN EHRLICHES BEISPIEL</a:t>
+            </a:r>
+          </a:p>
+        </p:txBody>
+      </p:sp>
+      <p:sp>
+        <p:nvSpPr>
+          <p:cNvPr id="3" name="Rectangle 2"/>
           <p:cNvSpPr/>
           <p:nvPr/>
         </p:nvSpPr>
         <p:spPr>
           <a:xfrm>
-            <a:off x="548640" y="502920"/>
-            <a:ext cx="201168" cy="201168"/>
+            <a:off x="548640" y="1554480"/>
+            <a:ext cx="548640" cy="45720"/>
           </a:xfrm>
           <a:prstGeom prst="rect">
             <a:avLst/>
           </a:prstGeom>
           <a:solidFill>
-            <a:srgbClr val="1F6F6B"/>
+            <a:srgbClr val="DC822E"/>
           </a:solidFill>
           <a:ln>
             <a:noFill/>
@@ -5457,14 +6407,14 @@
       </p:sp>
       <p:sp>
         <p:nvSpPr>
-          <p:cNvPr id="3" name="TextBox 2"/>
+          <p:cNvPr id="4" name="TextBox 3"/>
           <p:cNvSpPr txBox="1"/>
           <p:nvPr/>
         </p:nvSpPr>
         <p:spPr>
           <a:xfrm>
-            <a:off x="868680" y="457200"/>
-            <a:ext cx="10424160" cy="1005840"/>
+            <a:off x="548640" y="1920240"/>
+            <a:ext cx="8046720" cy="2194560"/>
           </a:xfrm>
           <a:prstGeom prst="rect">
             <a:avLst/>
@@ -5477,36 +6427,28 @@
           </a:bodyPr>
           <a:lstStyle/>
           <a:p>
-            <a:pPr algn="l">
-              <a:spcBef>
-                <a:spcPts val="0"/>
-              </a:spcBef>
-              <a:spcAft>
-                <a:spcPts val="1000"/>
-              </a:spcAft>
-            </a:pPr>
             <a:r>
               <a:rPr sz="3200" b="1" i="0">
                 <a:solidFill>
-                  <a:srgbClr val="1F6F6B"/>
+                  <a:srgbClr val="F1ECDD"/>
                 </a:solidFill>
                 <a:latin typeface="Georgia"/>
               </a:rPr>
-              <a:t>Dein Wochenplan gibt Sicherheit</a:t>
-            </a:r>
-          </a:p>
-        </p:txBody>
-      </p:sp>
-      <p:sp>
-        <p:nvSpPr>
-          <p:cNvPr id="4" name="TextBox 3"/>
+              <a:t>Auch bei mir kommt das Leben dazwischen.</a:t>
+            </a:r>
+          </a:p>
+        </p:txBody>
+      </p:sp>
+      <p:sp>
+        <p:nvSpPr>
+          <p:cNvPr id="5" name="TextBox 4"/>
           <p:cNvSpPr txBox="1"/>
           <p:nvPr/>
         </p:nvSpPr>
         <p:spPr>
           <a:xfrm>
-            <a:off x="868680" y="1783080"/>
-            <a:ext cx="10424160" cy="4572000"/>
+            <a:off x="548640" y="3703320"/>
+            <a:ext cx="8046720" cy="731520"/>
           </a:xfrm>
           <a:prstGeom prst="rect">
             <a:avLst/>
@@ -5519,144 +6461,28 @@
           </a:bodyPr>
           <a:lstStyle/>
           <a:p>
-            <a:pPr algn="l">
-              <a:spcBef>
-                <a:spcPts val="0"/>
-              </a:spcBef>
-              <a:spcAft>
-                <a:spcPts val="1400"/>
-              </a:spcAft>
-            </a:pPr>
-            <a:r>
-              <a:rPr sz="2600" b="1" i="0">
-                <a:solidFill>
-                  <a:srgbClr val="2A2A2A"/>
-                </a:solidFill>
-                <a:latin typeface="Georgia"/>
-              </a:rPr>
-              <a:t>Auch im Chaos weisst du, wie's morgen weitergeht — es steht schon drin.</a:t>
-            </a:r>
-          </a:p>
-          <a:p>
-            <a:pPr algn="l">
-              <a:spcBef>
-                <a:spcPts val="0"/>
-              </a:spcBef>
-              <a:spcAft>
-                <a:spcPts val="1400"/>
-              </a:spcAft>
-            </a:pPr>
-            <a:r>
-              <a:rPr sz="2100" b="0" i="0">
-                <a:solidFill>
-                  <a:srgbClr val="2A2A2A"/>
+            <a:r>
+              <a:rPr sz="1500" b="0" i="1">
+                <a:solidFill>
+                  <a:srgbClr val="F1ECDD"/>
                 </a:solidFill>
                 <a:latin typeface="Calibri"/>
               </a:rPr>
-              <a:t>Du musst nichts neu erfinden.</a:t>
-            </a:r>
-          </a:p>
-          <a:p>
-            <a:pPr algn="l">
-              <a:spcBef>
-                <a:spcPts val="0"/>
-              </a:spcBef>
-              <a:spcAft>
-                <a:spcPts val="1400"/>
-              </a:spcAft>
-            </a:pPr>
-            <a:r>
-              <a:rPr sz="2000" b="0" i="1">
-                <a:solidFill>
-                  <a:srgbClr val="6E6E6E"/>
-                </a:solidFill>
-                <a:latin typeface="Calibri"/>
-              </a:rPr>
-              <a:t>Später nimmt dir der Cockpit-Bot (Säule 4) sogar das Reinschauen ab.</a:t>
-            </a:r>
-          </a:p>
-        </p:txBody>
-      </p:sp>
-    </p:spTree>
-  </p:cSld>
-  <p:clrMapOvr>
-    <a:masterClrMapping/>
-  </p:clrMapOvr>
-</p:sld>
-</file>
-
-<file path=ppt/slides/slide8.xml><?xml version="1.0" encoding="utf-8"?>
-<p:sld xmlns:a="http://schemas.openxmlformats.org/drawingml/2006/main" xmlns:p="http://schemas.openxmlformats.org/presentationml/2006/main" xmlns:r="http://schemas.openxmlformats.org/officeDocument/2006/relationships">
-  <p:cSld>
-    <p:bg>
-      <p:bgPr>
-        <a:solidFill>
-          <a:srgbClr val="FFFFFF"/>
-        </a:solidFill>
-        <a:effectLst/>
-      </p:bgPr>
-    </p:bg>
-    <p:spTree>
-      <p:nvGrpSpPr>
-        <p:cNvPr id="1" name=""/>
-        <p:cNvGrpSpPr/>
-        <p:nvPr/>
-      </p:nvGrpSpPr>
-      <p:grpSpPr/>
-      <p:sp>
-        <p:nvSpPr>
-          <p:cNvPr id="2" name="Rectangle 1"/>
-          <p:cNvSpPr/>
-          <p:nvPr/>
-        </p:nvSpPr>
-        <p:spPr>
-          <a:xfrm>
-            <a:off x="548640" y="502920"/>
-            <a:ext cx="201168" cy="201168"/>
-          </a:xfrm>
-          <a:prstGeom prst="rect">
-            <a:avLst/>
-          </a:prstGeom>
-          <a:solidFill>
-            <a:srgbClr val="1F6F6B"/>
-          </a:solidFill>
-          <a:ln>
-            <a:noFill/>
-          </a:ln>
-          <a:effectLst/>
-        </p:spPr>
-        <p:style>
-          <a:lnRef idx="1">
-            <a:schemeClr val="accent1"/>
-          </a:lnRef>
-          <a:fillRef idx="3">
-            <a:schemeClr val="accent1"/>
-          </a:fillRef>
-          <a:effectRef idx="2">
-            <a:schemeClr val="accent1"/>
-          </a:effectRef>
-          <a:fontRef idx="minor">
-            <a:schemeClr val="lt1"/>
-          </a:fontRef>
-        </p:style>
-        <p:txBody>
-          <a:bodyPr rtlCol="0" anchor="ctr"/>
-          <a:lstStyle/>
-          <a:p>
-            <a:pPr algn="ctr"/>
-          </a:p>
-        </p:txBody>
-      </p:sp>
-      <p:sp>
-        <p:nvSpPr>
-          <p:cNvPr id="3" name="TextBox 2"/>
+              <a:t>Kind + Familie im Zentrum — Business lief trotzdem. Nicht weil Übermama, sondern weil das System stand.</a:t>
+            </a:r>
+          </a:p>
+        </p:txBody>
+      </p:sp>
+      <p:sp>
+        <p:nvSpPr>
+          <p:cNvPr id="6" name="TextBox 5"/>
           <p:cNvSpPr txBox="1"/>
           <p:nvPr/>
         </p:nvSpPr>
         <p:spPr>
           <a:xfrm>
-            <a:off x="868680" y="457200"/>
-            <a:ext cx="10424160" cy="1005840"/>
+            <a:off x="457200" y="4754880"/>
+            <a:ext cx="5486400" cy="274320"/>
           </a:xfrm>
           <a:prstGeom prst="rect">
             <a:avLst/>
@@ -5669,36 +6495,28 @@
           </a:bodyPr>
           <a:lstStyle/>
           <a:p>
-            <a:pPr algn="l">
-              <a:spcBef>
-                <a:spcPts val="0"/>
-              </a:spcBef>
-              <a:spcAft>
-                <a:spcPts val="1000"/>
-              </a:spcAft>
-            </a:pPr>
-            <a:r>
-              <a:rPr sz="3200" b="1" i="0">
-                <a:solidFill>
-                  <a:srgbClr val="1F6F6B"/>
-                </a:solidFill>
-                <a:latin typeface="Georgia"/>
+            <a:r>
+              <a:rPr sz="900" b="0" i="0">
+                <a:solidFill>
+                  <a:srgbClr val="F1ECDD"/>
+                </a:solidFill>
+                <a:latin typeface="Calibri"/>
               </a:rPr>
-              <a:t>Mein ehrliches Beispiel</a:t>
-            </a:r>
-          </a:p>
-        </p:txBody>
-      </p:sp>
-      <p:sp>
-        <p:nvSpPr>
-          <p:cNvPr id="4" name="TextBox 3"/>
+              <a:t>Mama-CEO · Säule 3 · Lektion 3.6</a:t>
+            </a:r>
+          </a:p>
+        </p:txBody>
+      </p:sp>
+      <p:sp>
+        <p:nvSpPr>
+          <p:cNvPr id="7" name="TextBox 6"/>
           <p:cNvSpPr txBox="1"/>
           <p:nvPr/>
         </p:nvSpPr>
         <p:spPr>
           <a:xfrm>
-            <a:off x="868680" y="1783080"/>
-            <a:ext cx="10424160" cy="4572000"/>
+            <a:off x="6400800" y="4754880"/>
+            <a:ext cx="2286000" cy="274320"/>
           </a:xfrm>
           <a:prstGeom prst="rect">
             <a:avLst/>
@@ -5711,60 +6529,15 @@
           </a:bodyPr>
           <a:lstStyle/>
           <a:p>
-            <a:pPr algn="l">
-              <a:spcBef>
-                <a:spcPts val="0"/>
-              </a:spcBef>
-              <a:spcAft>
-                <a:spcPts val="1400"/>
-              </a:spcAft>
-            </a:pPr>
-            <a:r>
-              <a:rPr sz="2100" b="0" i="0">
-                <a:solidFill>
-                  <a:srgbClr val="2A2A2A"/>
+            <a:pPr algn="r"/>
+            <a:r>
+              <a:rPr sz="900" b="0" i="0">
+                <a:solidFill>
+                  <a:srgbClr val="F1ECDD"/>
                 </a:solidFill>
                 <a:latin typeface="Calibri"/>
               </a:rPr>
-              <a:t>Auch bei mir kommt das Leben dazwischen.</a:t>
-            </a:r>
-          </a:p>
-          <a:p>
-            <a:pPr algn="l">
-              <a:spcBef>
-                <a:spcPts val="0"/>
-              </a:spcBef>
-              <a:spcAft>
-                <a:spcPts val="1400"/>
-              </a:spcAft>
-            </a:pPr>
-            <a:r>
-              <a:rPr sz="2100" b="0" i="0">
-                <a:solidFill>
-                  <a:srgbClr val="2A2A2A"/>
-                </a:solidFill>
-                <a:latin typeface="Calibri"/>
-              </a:rPr>
-              <a:t>Kind und Familie im Zentrum — Business lief trotzdem weiter.</a:t>
-            </a:r>
-          </a:p>
-          <a:p>
-            <a:pPr algn="l">
-              <a:spcBef>
-                <a:spcPts val="0"/>
-              </a:spcBef>
-              <a:spcAft>
-                <a:spcPts val="1400"/>
-              </a:spcAft>
-            </a:pPr>
-            <a:r>
-              <a:rPr sz="2000" b="0" i="1">
-                <a:solidFill>
-                  <a:srgbClr val="6E6E6E"/>
-                </a:solidFill>
-                <a:latin typeface="Calibri"/>
-              </a:rPr>
-              <a:t>Nicht weil ich eine Übermama bin. Weil das System stand.</a:t>
+              <a:t>Mum Life Balance</a:t>
             </a:r>
           </a:p>
         </p:txBody>
@@ -5797,58 +6570,14 @@
       <p:grpSpPr/>
       <p:sp>
         <p:nvSpPr>
-          <p:cNvPr id="2" name="Rectangle 1"/>
-          <p:cNvSpPr/>
-          <p:nvPr/>
-        </p:nvSpPr>
-        <p:spPr>
-          <a:xfrm>
-            <a:off x="548640" y="502920"/>
-            <a:ext cx="201168" cy="201168"/>
-          </a:xfrm>
-          <a:prstGeom prst="rect">
-            <a:avLst/>
-          </a:prstGeom>
-          <a:solidFill>
-            <a:srgbClr val="1F6F6B"/>
-          </a:solidFill>
-          <a:ln>
-            <a:noFill/>
-          </a:ln>
-          <a:effectLst/>
-        </p:spPr>
-        <p:style>
-          <a:lnRef idx="1">
-            <a:schemeClr val="accent1"/>
-          </a:lnRef>
-          <a:fillRef idx="3">
-            <a:schemeClr val="accent1"/>
-          </a:fillRef>
-          <a:effectRef idx="2">
-            <a:schemeClr val="accent1"/>
-          </a:effectRef>
-          <a:fontRef idx="minor">
-            <a:schemeClr val="lt1"/>
-          </a:fontRef>
-        </p:style>
-        <p:txBody>
-          <a:bodyPr rtlCol="0" anchor="ctr"/>
-          <a:lstStyle/>
-          <a:p>
-            <a:pPr algn="ctr"/>
-          </a:p>
-        </p:txBody>
-      </p:sp>
-      <p:sp>
-        <p:nvSpPr>
-          <p:cNvPr id="3" name="TextBox 2"/>
+          <p:cNvPr id="2" name="TextBox 1"/>
           <p:cNvSpPr txBox="1"/>
           <p:nvPr/>
         </p:nvSpPr>
         <p:spPr>
           <a:xfrm>
-            <a:off x="868680" y="457200"/>
-            <a:ext cx="10424160" cy="1005840"/>
+            <a:off x="548640" y="457200"/>
+            <a:ext cx="8046720" cy="914400"/>
           </a:xfrm>
           <a:prstGeom prst="rect">
             <a:avLst/>
@@ -5861,7 +6590,41 @@
           </a:bodyPr>
           <a:lstStyle/>
           <a:p>
-            <a:pPr algn="l">
+            <a:r>
+              <a:rPr sz="3000" b="1" i="0">
+                <a:solidFill>
+                  <a:srgbClr val="1A3A4A"/>
+                </a:solidFill>
+                <a:latin typeface="Georgia"/>
+              </a:rPr>
+              <a:t>Der Notfall-Tagesplaner</a:t>
+            </a:r>
+          </a:p>
+        </p:txBody>
+      </p:sp>
+      <p:sp>
+        <p:nvSpPr>
+          <p:cNvPr id="3" name="TextBox 2"/>
+          <p:cNvSpPr txBox="1"/>
+          <p:nvPr/>
+        </p:nvSpPr>
+        <p:spPr>
+          <a:xfrm>
+            <a:off x="548640" y="1417320"/>
+            <a:ext cx="8046720" cy="3154680"/>
+          </a:xfrm>
+          <a:prstGeom prst="rect">
+            <a:avLst/>
+          </a:prstGeom>
+          <a:noFill/>
+        </p:spPr>
+        <p:txBody>
+          <a:bodyPr wrap="square" anchor="t" lIns="0" rIns="0" tIns="0" bIns="0">
+            <a:spAutoFit/>
+          </a:bodyPr>
+          <a:lstStyle/>
+          <a:p>
+            <a:pPr>
               <a:spcBef>
                 <a:spcPts val="0"/>
               </a:spcBef>
@@ -5870,13 +6633,51 @@
               </a:spcAft>
             </a:pPr>
             <a:r>
-              <a:rPr sz="3200" b="1" i="0">
-                <a:solidFill>
-                  <a:srgbClr val="1F6F6B"/>
+              <a:rPr sz="2100" b="1" i="0">
+                <a:solidFill>
+                  <a:srgbClr val="1A3A4A"/>
                 </a:solidFill>
                 <a:latin typeface="Georgia"/>
               </a:rPr>
-              <a:t>Der Notfall-Tagesplaner</a:t>
+              <a:t>1 Business-Sache. Rest: Familie.</a:t>
+            </a:r>
+          </a:p>
+          <a:p>
+            <a:pPr>
+              <a:spcBef>
+                <a:spcPts val="0"/>
+              </a:spcBef>
+              <a:spcAft>
+                <a:spcPts val="900"/>
+              </a:spcAft>
+            </a:pPr>
+            <a:r>
+              <a:rPr sz="1600" b="0" i="0">
+                <a:solidFill>
+                  <a:srgbClr val="2C3E50"/>
+                </a:solidFill>
+                <a:latin typeface="Calibri"/>
+              </a:rPr>
+              <a:t>„Heute reicht das.“</a:t>
+            </a:r>
+          </a:p>
+          <a:p>
+            <a:pPr>
+              <a:spcBef>
+                <a:spcPts val="0"/>
+              </a:spcBef>
+              <a:spcAft>
+                <a:spcPts val="800"/>
+              </a:spcAft>
+            </a:pPr>
+            <a:r>
+              <a:rPr sz="1400" b="0" i="1">
+                <a:solidFill>
+                  <a:srgbClr val="7A8A95"/>
+                </a:solidFill>
+                <a:latin typeface="Calibri"/>
+              </a:rPr>
+              <a:t>Leg ihn dir in Notion als Vorlage bereit — für den Tag, an dem du nicht überlegen willst.</a:t>
             </a:r>
           </a:p>
         </p:txBody>
@@ -5889,8 +6690,8 @@
         </p:nvSpPr>
         <p:spPr>
           <a:xfrm>
-            <a:off x="868680" y="1783080"/>
-            <a:ext cx="10424160" cy="4572000"/>
+            <a:off x="457200" y="4754880"/>
+            <a:ext cx="5486400" cy="274320"/>
           </a:xfrm>
           <a:prstGeom prst="rect">
             <a:avLst/>
@@ -5903,60 +6704,49 @@
           </a:bodyPr>
           <a:lstStyle/>
           <a:p>
-            <a:pPr algn="l">
-              <a:spcBef>
-                <a:spcPts val="0"/>
-              </a:spcBef>
-              <a:spcAft>
-                <a:spcPts val="1400"/>
-              </a:spcAft>
-            </a:pPr>
-            <a:r>
-              <a:rPr sz="2600" b="1" i="0">
-                <a:solidFill>
-                  <a:srgbClr val="2A2A2A"/>
-                </a:solidFill>
-                <a:latin typeface="Georgia"/>
-              </a:rPr>
-              <a:t>1 Business-Sache. Rest: Familie.</a:t>
-            </a:r>
-          </a:p>
-          <a:p>
-            <a:pPr algn="l">
-              <a:spcBef>
-                <a:spcPts val="0"/>
-              </a:spcBef>
-              <a:spcAft>
-                <a:spcPts val="1400"/>
-              </a:spcAft>
-            </a:pPr>
-            <a:r>
-              <a:rPr sz="2100" b="0" i="0">
-                <a:solidFill>
-                  <a:srgbClr val="2A2A2A"/>
+            <a:r>
+              <a:rPr sz="900" b="0" i="0">
+                <a:solidFill>
+                  <a:srgbClr val="7A8A95"/>
                 </a:solidFill>
                 <a:latin typeface="Calibri"/>
               </a:rPr>
-              <a:t>„Heute reicht das.“</a:t>
-            </a:r>
-          </a:p>
-          <a:p>
-            <a:pPr algn="l">
-              <a:spcBef>
-                <a:spcPts val="0"/>
-              </a:spcBef>
-              <a:spcAft>
-                <a:spcPts val="1400"/>
-              </a:spcAft>
-            </a:pPr>
-            <a:r>
-              <a:rPr sz="2000" b="0" i="1">
-                <a:solidFill>
-                  <a:srgbClr val="6E6E6E"/>
+              <a:t>Mama-CEO · Säule 3 · Lektion 3.6</a:t>
+            </a:r>
+          </a:p>
+        </p:txBody>
+      </p:sp>
+      <p:sp>
+        <p:nvSpPr>
+          <p:cNvPr id="5" name="TextBox 4"/>
+          <p:cNvSpPr txBox="1"/>
+          <p:nvPr/>
+        </p:nvSpPr>
+        <p:spPr>
+          <a:xfrm>
+            <a:off x="6400800" y="4754880"/>
+            <a:ext cx="2286000" cy="274320"/>
+          </a:xfrm>
+          <a:prstGeom prst="rect">
+            <a:avLst/>
+          </a:prstGeom>
+          <a:noFill/>
+        </p:spPr>
+        <p:txBody>
+          <a:bodyPr wrap="square" anchor="t" lIns="0" rIns="0" tIns="0" bIns="0">
+            <a:spAutoFit/>
+          </a:bodyPr>
+          <a:lstStyle/>
+          <a:p>
+            <a:pPr algn="r"/>
+            <a:r>
+              <a:rPr sz="900" b="0" i="0">
+                <a:solidFill>
+                  <a:srgbClr val="7A8A95"/>
                 </a:solidFill>
                 <a:latin typeface="Calibri"/>
               </a:rPr>
-              <a:t>Leg ihn dir in Notion als Vorlage bereit — für den Tag, an dem du nicht überlegen willst.</a:t>
+              <a:t>Mum Life Balance</a:t>
             </a:r>
           </a:p>
         </p:txBody>
